--- a/python_course/chapter_02_working_with_data/presentation.pptx
+++ b/python_course/chapter_02_working_with_data/presentation.pptx
@@ -16,7 +16,7 @@
     <p:sldId id="264" r:id="rId15"/>
     <p:sldId id="265" r:id="rId16"/>
   </p:sldIdLst>
-  <p:sldSz cx="9144000" cy="6858000" type="screen4x3"/>
+  <p:sldSz cx="12191695" cy="6858000" type="screen4x3"/>
   <p:notesSz cx="6858000" cy="9144000"/>
   <p:defaultTextStyle>
     <a:defPPr>
@@ -3090,14 +3090,6 @@
 <file path=ppt/slides/slide1.xml><?xml version="1.0" encoding="utf-8"?>
 <p:sld xmlns:a="http://schemas.openxmlformats.org/drawingml/2006/main" xmlns:p="http://schemas.openxmlformats.org/presentationml/2006/main" xmlns:r="http://schemas.openxmlformats.org/officeDocument/2006/relationships">
   <p:cSld>
-    <p:bg>
-      <p:bgPr>
-        <a:solidFill>
-          <a:srgbClr val="EFF6FF"/>
-        </a:solidFill>
-        <a:effectLst/>
-      </p:bgPr>
-    </p:bg>
     <p:spTree>
       <p:nvGrpSpPr>
         <p:cNvPr id="1" name=""/>
@@ -3107,90 +3099,20 @@
       <p:grpSpPr/>
       <p:sp>
         <p:nvSpPr>
-          <p:cNvPr id="2" name="TextBox 1"/>
-          <p:cNvSpPr txBox="1"/>
-          <p:nvPr/>
-        </p:nvSpPr>
-        <p:spPr>
-          <a:xfrm>
-            <a:off x="0" y="1371600"/>
-            <a:ext cx="9144000" cy="914400"/>
-          </a:xfrm>
-          <a:prstGeom prst="rect">
-            <a:avLst/>
-          </a:prstGeom>
-          <a:noFill/>
-        </p:spPr>
-        <p:txBody>
-          <a:bodyPr wrap="none">
-            <a:spAutoFit/>
-          </a:bodyPr>
-          <a:lstStyle/>
-          <a:p>
-            <a:pPr algn="ctr">
-              <a:defRPr sz="6000" b="1">
-                <a:solidFill>
-                  <a:srgbClr val="1F2937"/>
-                </a:solidFill>
-              </a:defRPr>
-            </a:pPr>
-            <a:r>
-              <a:t>Chapter 2</a:t>
-            </a:r>
-          </a:p>
-        </p:txBody>
-      </p:sp>
-      <p:sp>
-        <p:nvSpPr>
-          <p:cNvPr id="3" name="TextBox 2"/>
-          <p:cNvSpPr txBox="1"/>
-          <p:nvPr/>
-        </p:nvSpPr>
-        <p:spPr>
-          <a:xfrm>
-            <a:off x="0" y="2286000"/>
-            <a:ext cx="9144000" cy="914400"/>
-          </a:xfrm>
-          <a:prstGeom prst="rect">
-            <a:avLst/>
-          </a:prstGeom>
-          <a:noFill/>
-        </p:spPr>
-        <p:txBody>
-          <a:bodyPr wrap="none">
-            <a:spAutoFit/>
-          </a:bodyPr>
-          <a:lstStyle/>
-          <a:p>
-            <a:pPr algn="ctr">
-              <a:defRPr sz="4800" b="1">
-                <a:solidFill>
-                  <a:srgbClr val="2563EB"/>
-                </a:solidFill>
-              </a:defRPr>
-            </a:pPr>
-            <a:r>
-              <a:t>Working with Data</a:t>
-            </a:r>
-          </a:p>
-        </p:txBody>
-      </p:sp>
-      <p:sp>
-        <p:nvSpPr>
-          <p:cNvPr id="4" name="Rectangle 3"/>
+          <p:cNvPr id="2" name="Rectangle 1"/>
           <p:cNvSpPr/>
           <p:nvPr/>
         </p:nvSpPr>
         <p:spPr>
           <a:xfrm>
-            <a:off x="3840480" y="3383280"/>
-            <a:ext cx="2377440" cy="18288"/>
+            <a:off x="0" y="0"/>
+            <a:ext cx="12191695" cy="6858000"/>
           </a:xfrm>
           <a:prstGeom prst="rect">
             <a:avLst/>
           </a:prstGeom>
           <a:solidFill>
-            <a:srgbClr val="2563EB"/>
+            <a:srgbClr val="F0F8FF"/>
           </a:solidFill>
           <a:ln>
             <a:noFill/>
@@ -3220,14 +3142,14 @@
       </p:sp>
       <p:sp>
         <p:nvSpPr>
-          <p:cNvPr id="5" name="TextBox 4"/>
+          <p:cNvPr id="3" name="TextBox 2"/>
           <p:cNvSpPr txBox="1"/>
           <p:nvPr/>
         </p:nvSpPr>
         <p:spPr>
           <a:xfrm>
-            <a:off x="0" y="3840480"/>
-            <a:ext cx="9144000" cy="731520"/>
+            <a:off x="914400" y="1828800"/>
+            <a:ext cx="10360152" cy="1371600"/>
           </a:xfrm>
           <a:prstGeom prst="rect">
             <a:avLst/>
@@ -3241,58 +3163,85 @@
           <a:lstStyle/>
           <a:p>
             <a:pPr algn="ctr">
-              <a:defRPr sz="2800">
-                <a:solidFill>
-                  <a:srgbClr val="4B5563"/>
+              <a:defRPr sz="5400" b="1">
+                <a:solidFill>
+                  <a:srgbClr val="003366"/>
                 </a:solidFill>
               </a:defRPr>
             </a:pPr>
             <a:r>
-              <a:t>Interactive Programs &amp; Type Conversion</a:t>
-            </a:r>
-          </a:p>
-        </p:txBody>
-      </p:sp>
-      <p:sp>
-        <p:nvSpPr>
-          <p:cNvPr id="6" name="Rectangle 5"/>
-          <p:cNvSpPr/>
+              <a:t>Chapter 2</a:t>
+            </a:r>
+          </a:p>
+        </p:txBody>
+      </p:sp>
+      <p:sp>
+        <p:nvSpPr>
+          <p:cNvPr id="4" name="TextBox 3"/>
+          <p:cNvSpPr txBox="1"/>
           <p:nvPr/>
         </p:nvSpPr>
         <p:spPr>
           <a:xfrm>
-            <a:off x="0" y="6720840"/>
-            <a:ext cx="9144000" cy="137160"/>
+            <a:off x="914400" y="3657600"/>
+            <a:ext cx="10360152" cy="548640"/>
           </a:xfrm>
           <a:prstGeom prst="rect">
             <a:avLst/>
           </a:prstGeom>
-          <a:solidFill>
-            <a:srgbClr val="2563EB"/>
-          </a:solidFill>
-          <a:ln>
-            <a:noFill/>
-          </a:ln>
-        </p:spPr>
-        <p:style>
-          <a:lnRef idx="1">
-            <a:schemeClr val="accent1"/>
-          </a:lnRef>
-          <a:fillRef idx="3">
-            <a:schemeClr val="accent1"/>
-          </a:fillRef>
-          <a:effectRef idx="2">
-            <a:schemeClr val="accent1"/>
-          </a:effectRef>
-          <a:fontRef idx="minor">
-            <a:schemeClr val="lt1"/>
-          </a:fontRef>
-        </p:style>
-        <p:txBody>
-          <a:bodyPr rtlCol="0" anchor="ctr"/>
-          <a:lstStyle/>
-          <a:p>
-            <a:pPr algn="ctr"/>
+          <a:noFill/>
+        </p:spPr>
+        <p:txBody>
+          <a:bodyPr wrap="none">
+            <a:spAutoFit/>
+          </a:bodyPr>
+          <a:lstStyle/>
+          <a:p>
+            <a:pPr algn="ctr">
+              <a:defRPr sz="2800">
+                <a:solidFill>
+                  <a:srgbClr val="4682B4"/>
+                </a:solidFill>
+              </a:defRPr>
+            </a:pPr>
+            <a:r>
+              <a:t>Working with Data</a:t>
+            </a:r>
+          </a:p>
+        </p:txBody>
+      </p:sp>
+      <p:sp>
+        <p:nvSpPr>
+          <p:cNvPr id="5" name="TextBox 4"/>
+          <p:cNvSpPr txBox="1"/>
+          <p:nvPr/>
+        </p:nvSpPr>
+        <p:spPr>
+          <a:xfrm>
+            <a:off x="914400" y="4297680"/>
+            <a:ext cx="10360152" cy="548640"/>
+          </a:xfrm>
+          <a:prstGeom prst="rect">
+            <a:avLst/>
+          </a:prstGeom>
+          <a:noFill/>
+        </p:spPr>
+        <p:txBody>
+          <a:bodyPr wrap="none">
+            <a:spAutoFit/>
+          </a:bodyPr>
+          <a:lstStyle/>
+          <a:p>
+            <a:pPr algn="ctr">
+              <a:defRPr sz="2800">
+                <a:solidFill>
+                  <a:srgbClr val="4682B4"/>
+                </a:solidFill>
+              </a:defRPr>
+            </a:pPr>
+            <a:r>
+              <a:t>Interactive Programs &amp; Type Conversion</a:t>
+            </a:r>
           </a:p>
         </p:txBody>
       </p:sp>
@@ -3307,14 +3256,6 @@
 <file path=ppt/slides/slide10.xml><?xml version="1.0" encoding="utf-8"?>
 <p:sld xmlns:a="http://schemas.openxmlformats.org/drawingml/2006/main" xmlns:p="http://schemas.openxmlformats.org/presentationml/2006/main" xmlns:r="http://schemas.openxmlformats.org/officeDocument/2006/relationships">
   <p:cSld>
-    <p:bg>
-      <p:bgPr>
-        <a:solidFill>
-          <a:srgbClr val="2563EB"/>
-        </a:solidFill>
-        <a:effectLst/>
-      </p:bgPr>
-    </p:bg>
     <p:spTree>
       <p:nvGrpSpPr>
         <p:cNvPr id="1" name=""/>
@@ -3324,90 +3265,20 @@
       <p:grpSpPr/>
       <p:sp>
         <p:nvSpPr>
-          <p:cNvPr id="2" name="TextBox 1"/>
-          <p:cNvSpPr txBox="1"/>
-          <p:nvPr/>
-        </p:nvSpPr>
-        <p:spPr>
-          <a:xfrm>
-            <a:off x="0" y="2286000"/>
-            <a:ext cx="9144000" cy="914400"/>
-          </a:xfrm>
-          <a:prstGeom prst="rect">
-            <a:avLst/>
-          </a:prstGeom>
-          <a:noFill/>
-        </p:spPr>
-        <p:txBody>
-          <a:bodyPr wrap="none">
-            <a:spAutoFit/>
-          </a:bodyPr>
-          <a:lstStyle/>
-          <a:p>
-            <a:pPr algn="ctr">
-              <a:defRPr sz="6000" b="1">
-                <a:solidFill>
-                  <a:srgbClr val="FFFFFF"/>
-                </a:solidFill>
-              </a:defRPr>
-            </a:pPr>
-            <a:r>
-              <a:t>Time to Build!</a:t>
-            </a:r>
-          </a:p>
-        </p:txBody>
-      </p:sp>
-      <p:sp>
-        <p:nvSpPr>
-          <p:cNvPr id="3" name="TextBox 2"/>
-          <p:cNvSpPr txBox="1"/>
-          <p:nvPr/>
-        </p:nvSpPr>
-        <p:spPr>
-          <a:xfrm>
-            <a:off x="0" y="3383280"/>
-            <a:ext cx="9144000" cy="731520"/>
-          </a:xfrm>
-          <a:prstGeom prst="rect">
-            <a:avLst/>
-          </a:prstGeom>
-          <a:noFill/>
-        </p:spPr>
-        <p:txBody>
-          <a:bodyPr wrap="none">
-            <a:spAutoFit/>
-          </a:bodyPr>
-          <a:lstStyle/>
-          <a:p>
-            <a:pPr algn="ctr">
-              <a:defRPr sz="2800">
-                <a:solidFill>
-                  <a:srgbClr val="FFFFFF"/>
-                </a:solidFill>
-              </a:defRPr>
-            </a:pPr>
-            <a:r>
-              <a:t>Create interactive programs that respond to users</a:t>
-            </a:r>
-          </a:p>
-        </p:txBody>
-      </p:sp>
-      <p:sp>
-        <p:nvSpPr>
-          <p:cNvPr id="4" name="Rectangle 3"/>
+          <p:cNvPr id="2" name="Rectangle 1"/>
           <p:cNvSpPr/>
           <p:nvPr/>
         </p:nvSpPr>
         <p:spPr>
           <a:xfrm>
-            <a:off x="3840480" y="4297680"/>
-            <a:ext cx="1463040" cy="18288"/>
+            <a:off x="0" y="0"/>
+            <a:ext cx="12191695" cy="6858000"/>
           </a:xfrm>
           <a:prstGeom prst="rect">
             <a:avLst/>
           </a:prstGeom>
           <a:solidFill>
-            <a:srgbClr val="FFFFFF"/>
+            <a:srgbClr val="F0F8FF"/>
           </a:solidFill>
           <a:ln>
             <a:noFill/>
@@ -3437,14 +3308,14 @@
       </p:sp>
       <p:sp>
         <p:nvSpPr>
-          <p:cNvPr id="5" name="TextBox 4"/>
+          <p:cNvPr id="3" name="TextBox 2"/>
           <p:cNvSpPr txBox="1"/>
           <p:nvPr/>
         </p:nvSpPr>
         <p:spPr>
           <a:xfrm>
-            <a:off x="0" y="4754880"/>
-            <a:ext cx="9144000" cy="731520"/>
+            <a:off x="914400" y="1828800"/>
+            <a:ext cx="10360152" cy="1371600"/>
           </a:xfrm>
           <a:prstGeom prst="rect">
             <a:avLst/>
@@ -3458,14 +3329,84 @@
           <a:lstStyle/>
           <a:p>
             <a:pPr algn="ctr">
-              <a:defRPr sz="2400">
-                <a:solidFill>
-                  <a:srgbClr val="FFFFFF"/>
+              <a:defRPr sz="5400" b="1">
+                <a:solidFill>
+                  <a:srgbClr val="003366"/>
                 </a:solidFill>
               </a:defRPr>
             </a:pPr>
             <a:r>
-              <a:t>Remember: Practice makes perfect!</a:t>
+              <a:t>Time to Build!</a:t>
+            </a:r>
+          </a:p>
+        </p:txBody>
+      </p:sp>
+      <p:sp>
+        <p:nvSpPr>
+          <p:cNvPr id="4" name="TextBox 3"/>
+          <p:cNvSpPr txBox="1"/>
+          <p:nvPr/>
+        </p:nvSpPr>
+        <p:spPr>
+          <a:xfrm>
+            <a:off x="914400" y="3657600"/>
+            <a:ext cx="10360152" cy="548640"/>
+          </a:xfrm>
+          <a:prstGeom prst="rect">
+            <a:avLst/>
+          </a:prstGeom>
+          <a:noFill/>
+        </p:spPr>
+        <p:txBody>
+          <a:bodyPr wrap="none">
+            <a:spAutoFit/>
+          </a:bodyPr>
+          <a:lstStyle/>
+          <a:p>
+            <a:pPr algn="ctr">
+              <a:defRPr sz="2800">
+                <a:solidFill>
+                  <a:srgbClr val="4682B4"/>
+                </a:solidFill>
+              </a:defRPr>
+            </a:pPr>
+            <a:r>
+              <a:t>Create interactive programs that respond to users</a:t>
+            </a:r>
+          </a:p>
+        </p:txBody>
+      </p:sp>
+      <p:sp>
+        <p:nvSpPr>
+          <p:cNvPr id="5" name="TextBox 4"/>
+          <p:cNvSpPr txBox="1"/>
+          <p:nvPr/>
+        </p:nvSpPr>
+        <p:spPr>
+          <a:xfrm>
+            <a:off x="914400" y="4297680"/>
+            <a:ext cx="10360152" cy="548640"/>
+          </a:xfrm>
+          <a:prstGeom prst="rect">
+            <a:avLst/>
+          </a:prstGeom>
+          <a:noFill/>
+        </p:spPr>
+        <p:txBody>
+          <a:bodyPr wrap="none">
+            <a:spAutoFit/>
+          </a:bodyPr>
+          <a:lstStyle/>
+          <a:p>
+            <a:pPr algn="ctr">
+              <a:defRPr sz="2800">
+                <a:solidFill>
+                  <a:srgbClr val="4682B4"/>
+                </a:solidFill>
+              </a:defRPr>
+            </a:pPr>
+            <a:r>
+              <a:t>Remember: Practice makes perfect! 💪</a:t>
             </a:r>
           </a:p>
         </p:txBody>
@@ -3481,14 +3422,6 @@
 <file path=ppt/slides/slide2.xml><?xml version="1.0" encoding="utf-8"?>
 <p:sld xmlns:a="http://schemas.openxmlformats.org/drawingml/2006/main" xmlns:p="http://schemas.openxmlformats.org/presentationml/2006/main" xmlns:r="http://schemas.openxmlformats.org/officeDocument/2006/relationships">
   <p:cSld>
-    <p:bg>
-      <p:bgPr>
-        <a:solidFill>
-          <a:srgbClr val="FFFFFF"/>
-        </a:solidFill>
-        <a:effectLst/>
-      </p:bgPr>
-    </p:bg>
     <p:spTree>
       <p:nvGrpSpPr>
         <p:cNvPr id="1" name=""/>
@@ -3498,195 +3431,14 @@
       <p:grpSpPr/>
       <p:sp>
         <p:nvSpPr>
-          <p:cNvPr id="2" name="TextBox 1"/>
-          <p:cNvSpPr txBox="1"/>
-          <p:nvPr/>
-        </p:nvSpPr>
-        <p:spPr>
-          <a:xfrm>
-            <a:off x="457200" y="274320"/>
-            <a:ext cx="8229600" cy="731520"/>
-          </a:xfrm>
-          <a:prstGeom prst="rect">
-            <a:avLst/>
-          </a:prstGeom>
-          <a:noFill/>
-        </p:spPr>
-        <p:txBody>
-          <a:bodyPr wrap="none">
-            <a:spAutoFit/>
-          </a:bodyPr>
-          <a:lstStyle/>
-          <a:p>
-            <a:pPr>
-              <a:defRPr sz="4400" b="1">
-                <a:solidFill>
-                  <a:srgbClr val="1F2937"/>
-                </a:solidFill>
-              </a:defRPr>
-            </a:pPr>
-            <a:r>
-              <a:t>Getting User Input 💬</a:t>
-            </a:r>
-          </a:p>
-        </p:txBody>
-      </p:sp>
-      <p:sp>
-        <p:nvSpPr>
-          <p:cNvPr id="3" name="Rectangle 2"/>
+          <p:cNvPr id="2" name="Rectangle 1"/>
           <p:cNvSpPr/>
           <p:nvPr/>
         </p:nvSpPr>
         <p:spPr>
           <a:xfrm>
-            <a:off x="457200" y="914400"/>
-            <a:ext cx="1371600" cy="45720"/>
-          </a:xfrm>
-          <a:prstGeom prst="rect">
-            <a:avLst/>
-          </a:prstGeom>
-          <a:solidFill>
-            <a:srgbClr val="2563EB"/>
-          </a:solidFill>
-          <a:ln>
-            <a:noFill/>
-          </a:ln>
-        </p:spPr>
-        <p:style>
-          <a:lnRef idx="1">
-            <a:schemeClr val="accent1"/>
-          </a:lnRef>
-          <a:fillRef idx="3">
-            <a:schemeClr val="accent1"/>
-          </a:fillRef>
-          <a:effectRef idx="2">
-            <a:schemeClr val="accent1"/>
-          </a:effectRef>
-          <a:fontRef idx="minor">
-            <a:schemeClr val="lt1"/>
-          </a:fontRef>
-        </p:style>
-        <p:txBody>
-          <a:bodyPr rtlCol="0" anchor="ctr"/>
-          <a:lstStyle/>
-          <a:p>
-            <a:pPr algn="ctr"/>
-          </a:p>
-        </p:txBody>
-      </p:sp>
-      <p:sp>
-        <p:nvSpPr>
-          <p:cNvPr id="4" name="TextBox 3"/>
-          <p:cNvSpPr txBox="1"/>
-          <p:nvPr/>
-        </p:nvSpPr>
-        <p:spPr>
-          <a:xfrm>
-            <a:off x="457200" y="1280160"/>
-            <a:ext cx="8229600" cy="457200"/>
-          </a:xfrm>
-          <a:prstGeom prst="rect">
-            <a:avLst/>
-          </a:prstGeom>
-          <a:noFill/>
-        </p:spPr>
-        <p:txBody>
-          <a:bodyPr wrap="none">
-            <a:spAutoFit/>
-          </a:bodyPr>
-          <a:lstStyle/>
-          <a:p>
-            <a:pPr>
-              <a:defRPr sz="2200">
-                <a:solidFill>
-                  <a:srgbClr val="4B5563"/>
-                </a:solidFill>
-              </a:defRPr>
-            </a:pPr>
-            <a:r>
-              <a:t>The input() function lets users interact with your program!</a:t>
-            </a:r>
-          </a:p>
-        </p:txBody>
-      </p:sp>
-      <p:sp>
-        <p:nvSpPr>
-          <p:cNvPr id="5" name="Rectangle 4"/>
-          <p:cNvSpPr/>
-          <p:nvPr/>
-        </p:nvSpPr>
-        <p:spPr>
-          <a:xfrm>
-            <a:off x="457200" y="1920240"/>
-            <a:ext cx="8229600" cy="1097280"/>
-          </a:xfrm>
-          <a:prstGeom prst="rect">
-            <a:avLst/>
-          </a:prstGeom>
-          <a:solidFill>
-            <a:srgbClr val="EFF6FF"/>
-          </a:solidFill>
-          <a:ln>
-            <a:noFill/>
-          </a:ln>
-        </p:spPr>
-        <p:style>
-          <a:lnRef idx="1">
-            <a:schemeClr val="accent1"/>
-          </a:lnRef>
-          <a:fillRef idx="3">
-            <a:schemeClr val="accent1"/>
-          </a:fillRef>
-          <a:effectRef idx="2">
-            <a:schemeClr val="accent1"/>
-          </a:effectRef>
-          <a:fontRef idx="minor">
-            <a:schemeClr val="lt1"/>
-          </a:fontRef>
-        </p:style>
-        <p:txBody>
-          <a:bodyPr rtlCol="0" anchor="ctr" tIns="182880" lIns="274320"/>
-          <a:lstStyle/>
-          <a:p>
-            <a:pPr algn="ctr">
-              <a:defRPr sz="2400" b="1">
-                <a:solidFill>
-                  <a:srgbClr val="1F2937"/>
-                </a:solidFill>
-              </a:defRPr>
-            </a:pPr>
-            <a:r>
-              <a:t>Basic Syntax:</a:t>
-            </a:r>
-          </a:p>
-          <a:p>
-            <a:pPr>
-              <a:spcBef>
-                <a:spcPts val="1000"/>
-              </a:spcBef>
-              <a:defRPr sz="2000">
-                <a:solidFill>
-                  <a:srgbClr val="1F2937"/>
-                </a:solidFill>
-                <a:latin typeface="Courier New"/>
-              </a:defRPr>
-            </a:pPr>
-            <a:r>
-              <a:t>variable = input("Prompt message")</a:t>
-            </a:r>
-          </a:p>
-        </p:txBody>
-      </p:sp>
-      <p:sp>
-        <p:nvSpPr>
-          <p:cNvPr id="6" name="Rectangle 5"/>
-          <p:cNvSpPr/>
-          <p:nvPr/>
-        </p:nvSpPr>
-        <p:spPr>
-          <a:xfrm>
-            <a:off x="457200" y="3200400"/>
-            <a:ext cx="8229600" cy="1371600"/>
+            <a:off x="0" y="0"/>
+            <a:ext cx="12191695" cy="6858000"/>
           </a:xfrm>
           <a:prstGeom prst="rect">
             <a:avLst/>
@@ -3694,10 +3446,8 @@
           <a:solidFill>
             <a:srgbClr val="FFFFFF"/>
           </a:solidFill>
-          <a:ln w="25400">
-            <a:solidFill>
-              <a:srgbClr val="3B82F6"/>
-            </a:solidFill>
+          <a:ln>
+            <a:noFill/>
           </a:ln>
         </p:spPr>
         <p:style>
@@ -3715,70 +3465,29 @@
           </a:fontRef>
         </p:style>
         <p:txBody>
-          <a:bodyPr rtlCol="0" anchor="ctr" tIns="182880" lIns="274320"/>
-          <a:lstStyle/>
-          <a:p>
-            <a:pPr algn="ctr">
-              <a:defRPr sz="2400" b="1">
-                <a:solidFill>
-                  <a:srgbClr val="1F2937"/>
-                </a:solidFill>
-              </a:defRPr>
-            </a:pPr>
-            <a:r>
-              <a:t>Example:</a:t>
-            </a:r>
-          </a:p>
-          <a:p>
-            <a:pPr>
-              <a:spcBef>
-                <a:spcPts val="1000"/>
-              </a:spcBef>
-              <a:defRPr sz="2000">
-                <a:solidFill>
-                  <a:srgbClr val="1F2937"/>
-                </a:solidFill>
-                <a:latin typeface="Courier New"/>
-              </a:defRPr>
-            </a:pPr>
-            <a:r>
-              <a:t>name = input("What is your name? ")</a:t>
-            </a:r>
-          </a:p>
-          <a:p>
-            <a:pPr>
-              <a:spcBef>
-                <a:spcPts val="500"/>
-              </a:spcBef>
-              <a:defRPr sz="2000">
-                <a:solidFill>
-                  <a:srgbClr val="1F2937"/>
-                </a:solidFill>
-                <a:latin typeface="Courier New"/>
-              </a:defRPr>
-            </a:pPr>
-            <a:r>
-              <a:t>print("Hello,", name)</a:t>
-            </a:r>
-          </a:p>
-        </p:txBody>
-      </p:sp>
-      <p:sp>
-        <p:nvSpPr>
-          <p:cNvPr id="7" name="Rectangle 6"/>
+          <a:bodyPr rtlCol="0" anchor="ctr"/>
+          <a:lstStyle/>
+          <a:p>
+            <a:pPr algn="ctr"/>
+          </a:p>
+        </p:txBody>
+      </p:sp>
+      <p:sp>
+        <p:nvSpPr>
+          <p:cNvPr id="3" name="Rectangle 2"/>
           <p:cNvSpPr/>
           <p:nvPr/>
         </p:nvSpPr>
         <p:spPr>
           <a:xfrm>
-            <a:off x="457200" y="4846320"/>
-            <a:ext cx="8229600" cy="822960"/>
+            <a:off x="0" y="0"/>
+            <a:ext cx="12191695" cy="137160"/>
           </a:xfrm>
           <a:prstGeom prst="rect">
             <a:avLst/>
           </a:prstGeom>
           <a:solidFill>
-            <a:srgbClr val="FEFCE8"/>
+            <a:srgbClr val="0066CC"/>
           </a:solidFill>
           <a:ln>
             <a:noFill/>
@@ -3799,45 +3508,64 @@
           </a:fontRef>
         </p:style>
         <p:txBody>
-          <a:bodyPr rtlCol="0" anchor="ctr" tIns="137160" lIns="182880"/>
+          <a:bodyPr rtlCol="0" anchor="ctr"/>
           <a:lstStyle/>
           <a:p>
             <a:pPr algn="ctr"/>
-            <a:r>
-              <a:rPr sz="2000" b="1">
-                <a:solidFill>
-                  <a:srgbClr val="1F2937"/>
-                </a:solidFill>
-              </a:rPr>
-              <a:t>Note: </a:t>
-            </a:r>
-            <a:r>
-              <a:rPr sz="2000">
-                <a:solidFill>
-                  <a:srgbClr val="1F2937"/>
-                </a:solidFill>
-              </a:rPr>
-              <a:t>input() always returns a string (text)</a:t>
-            </a:r>
-          </a:p>
-        </p:txBody>
-      </p:sp>
-      <p:sp>
-        <p:nvSpPr>
-          <p:cNvPr id="8" name="Rectangle 7"/>
+          </a:p>
+        </p:txBody>
+      </p:sp>
+      <p:sp>
+        <p:nvSpPr>
+          <p:cNvPr id="4" name="TextBox 3"/>
+          <p:cNvSpPr txBox="1"/>
+          <p:nvPr/>
+        </p:nvSpPr>
+        <p:spPr>
+          <a:xfrm>
+            <a:off x="457200" y="365760"/>
+            <a:ext cx="10972800" cy="731520"/>
+          </a:xfrm>
+          <a:prstGeom prst="rect">
+            <a:avLst/>
+          </a:prstGeom>
+          <a:noFill/>
+        </p:spPr>
+        <p:txBody>
+          <a:bodyPr wrap="none">
+            <a:spAutoFit/>
+          </a:bodyPr>
+          <a:lstStyle/>
+          <a:p>
+            <a:pPr>
+              <a:defRPr sz="4000" b="1">
+                <a:solidFill>
+                  <a:srgbClr val="003366"/>
+                </a:solidFill>
+              </a:defRPr>
+            </a:pPr>
+            <a:r>
+              <a:t>Getting User Input 💬</a:t>
+            </a:r>
+          </a:p>
+        </p:txBody>
+      </p:sp>
+      <p:sp>
+        <p:nvSpPr>
+          <p:cNvPr id="5" name="Rectangle 4"/>
           <p:cNvSpPr/>
           <p:nvPr/>
         </p:nvSpPr>
         <p:spPr>
           <a:xfrm>
-            <a:off x="457200" y="4846320"/>
-            <a:ext cx="73152" cy="822960"/>
+            <a:off x="457200" y="1005840"/>
+            <a:ext cx="1828800" cy="45720"/>
           </a:xfrm>
           <a:prstGeom prst="rect">
             <a:avLst/>
           </a:prstGeom>
           <a:solidFill>
-            <a:srgbClr val="EAB308"/>
+            <a:srgbClr val="0066CC"/>
           </a:solidFill>
           <a:ln>
             <a:noFill/>
@@ -3862,6 +3590,89 @@
           <a:lstStyle/>
           <a:p>
             <a:pPr algn="ctr"/>
+          </a:p>
+        </p:txBody>
+      </p:sp>
+      <p:sp>
+        <p:nvSpPr>
+          <p:cNvPr id="6" name="TextBox 5"/>
+          <p:cNvSpPr txBox="1"/>
+          <p:nvPr/>
+        </p:nvSpPr>
+        <p:spPr>
+          <a:xfrm>
+            <a:off x="640080" y="1371600"/>
+            <a:ext cx="10789920" cy="4572000"/>
+          </a:xfrm>
+          <a:prstGeom prst="rect">
+            <a:avLst/>
+          </a:prstGeom>
+          <a:noFill/>
+        </p:spPr>
+        <p:txBody>
+          <a:bodyPr wrap="square">
+            <a:spAutoFit/>
+          </a:bodyPr>
+          <a:lstStyle/>
+          <a:p>
+            <a:pPr>
+              <a:spcAft>
+                <a:spcPts val="800"/>
+              </a:spcAft>
+              <a:defRPr sz="2000" b="1">
+                <a:solidFill>
+                  <a:srgbClr val="333333"/>
+                </a:solidFill>
+              </a:defRPr>
+            </a:pPr>
+            <a:r>
+              <a:t>The input() function lets users interact with your program!</a:t>
+            </a:r>
+          </a:p>
+          <a:p>
+            <a:pPr>
+              <a:spcAft>
+                <a:spcPts val="800"/>
+              </a:spcAft>
+              <a:defRPr sz="2000" b="1">
+                <a:solidFill>
+                  <a:srgbClr val="333333"/>
+                </a:solidFill>
+              </a:defRPr>
+            </a:pPr>
+            <a:r>
+              <a:t>Basic Syntax:</a:t>
+            </a:r>
+          </a:p>
+          <a:p>
+            <a:pPr>
+              <a:spcAft>
+                <a:spcPts val="800"/>
+              </a:spcAft>
+              <a:defRPr sz="2000" b="1">
+                <a:solidFill>
+                  <a:srgbClr val="333333"/>
+                </a:solidFill>
+              </a:defRPr>
+            </a:pPr>
+            <a:r>
+              <a:t>Example:</a:t>
+            </a:r>
+          </a:p>
+          <a:p>
+            <a:pPr>
+              <a:spcAft>
+                <a:spcPts val="800"/>
+              </a:spcAft>
+              <a:defRPr sz="2000" b="1">
+                <a:solidFill>
+                  <a:srgbClr val="333333"/>
+                </a:solidFill>
+              </a:defRPr>
+            </a:pPr>
+            <a:r>
+              <a:t>Note:input() always returns a string (text)</a:t>
+            </a:r>
           </a:p>
         </p:txBody>
       </p:sp>
@@ -3876,14 +3687,6 @@
 <file path=ppt/slides/slide3.xml><?xml version="1.0" encoding="utf-8"?>
 <p:sld xmlns:a="http://schemas.openxmlformats.org/drawingml/2006/main" xmlns:p="http://schemas.openxmlformats.org/presentationml/2006/main" xmlns:r="http://schemas.openxmlformats.org/officeDocument/2006/relationships">
   <p:cSld>
-    <p:bg>
-      <p:bgPr>
-        <a:solidFill>
-          <a:srgbClr val="EFF6FF"/>
-        </a:solidFill>
-        <a:effectLst/>
-      </p:bgPr>
-    </p:bg>
     <p:spTree>
       <p:nvGrpSpPr>
         <p:cNvPr id="1" name=""/>
@@ -3893,55 +3696,20 @@
       <p:grpSpPr/>
       <p:sp>
         <p:nvSpPr>
-          <p:cNvPr id="2" name="TextBox 1"/>
-          <p:cNvSpPr txBox="1"/>
-          <p:nvPr/>
-        </p:nvSpPr>
-        <p:spPr>
-          <a:xfrm>
-            <a:off x="457200" y="274320"/>
-            <a:ext cx="8229600" cy="731520"/>
-          </a:xfrm>
-          <a:prstGeom prst="rect">
-            <a:avLst/>
-          </a:prstGeom>
-          <a:noFill/>
-        </p:spPr>
-        <p:txBody>
-          <a:bodyPr wrap="none">
-            <a:spAutoFit/>
-          </a:bodyPr>
-          <a:lstStyle/>
-          <a:p>
-            <a:pPr>
-              <a:defRPr sz="4400" b="1">
-                <a:solidFill>
-                  <a:srgbClr val="1F2937"/>
-                </a:solidFill>
-              </a:defRPr>
-            </a:pPr>
-            <a:r>
-              <a:t>The Input Problem 🤔</a:t>
-            </a:r>
-          </a:p>
-        </p:txBody>
-      </p:sp>
-      <p:sp>
-        <p:nvSpPr>
-          <p:cNvPr id="3" name="Rectangle 2"/>
+          <p:cNvPr id="2" name="Rectangle 1"/>
           <p:cNvSpPr/>
           <p:nvPr/>
         </p:nvSpPr>
         <p:spPr>
           <a:xfrm>
-            <a:off x="457200" y="914400"/>
-            <a:ext cx="1371600" cy="45720"/>
+            <a:off x="0" y="0"/>
+            <a:ext cx="12191695" cy="6858000"/>
           </a:xfrm>
           <a:prstGeom prst="rect">
             <a:avLst/>
           </a:prstGeom>
           <a:solidFill>
-            <a:srgbClr val="2563EB"/>
+            <a:srgbClr val="FFFFFF"/>
           </a:solidFill>
           <a:ln>
             <a:noFill/>
@@ -3971,20 +3739,20 @@
       </p:sp>
       <p:sp>
         <p:nvSpPr>
-          <p:cNvPr id="4" name="Rectangle 3"/>
+          <p:cNvPr id="3" name="Rectangle 2"/>
           <p:cNvSpPr/>
           <p:nvPr/>
         </p:nvSpPr>
         <p:spPr>
           <a:xfrm>
-            <a:off x="457200" y="1371600"/>
-            <a:ext cx="8229600" cy="1645920"/>
+            <a:off x="0" y="0"/>
+            <a:ext cx="12191695" cy="137160"/>
           </a:xfrm>
           <a:prstGeom prst="rect">
             <a:avLst/>
           </a:prstGeom>
           <a:solidFill>
-            <a:srgbClr val="FEF2F2"/>
+            <a:srgbClr val="0066CC"/>
           </a:solidFill>
           <a:ln>
             <a:noFill/>
@@ -4005,66 +3773,44 @@
           </a:fontRef>
         </p:style>
         <p:txBody>
-          <a:bodyPr rtlCol="0" anchor="ctr" tIns="182880" lIns="274320"/>
-          <a:lstStyle/>
-          <a:p>
-            <a:pPr algn="ctr">
-              <a:defRPr sz="2600" b="1">
-                <a:solidFill>
-                  <a:srgbClr val="EF4444"/>
+          <a:bodyPr rtlCol="0" anchor="ctr"/>
+          <a:lstStyle/>
+          <a:p>
+            <a:pPr algn="ctr"/>
+          </a:p>
+        </p:txBody>
+      </p:sp>
+      <p:sp>
+        <p:nvSpPr>
+          <p:cNvPr id="4" name="TextBox 3"/>
+          <p:cNvSpPr txBox="1"/>
+          <p:nvPr/>
+        </p:nvSpPr>
+        <p:spPr>
+          <a:xfrm>
+            <a:off x="457200" y="365760"/>
+            <a:ext cx="10972800" cy="731520"/>
+          </a:xfrm>
+          <a:prstGeom prst="rect">
+            <a:avLst/>
+          </a:prstGeom>
+          <a:noFill/>
+        </p:spPr>
+        <p:txBody>
+          <a:bodyPr wrap="none">
+            <a:spAutoFit/>
+          </a:bodyPr>
+          <a:lstStyle/>
+          <a:p>
+            <a:pPr>
+              <a:defRPr sz="4000" b="1">
+                <a:solidFill>
+                  <a:srgbClr val="003366"/>
                 </a:solidFill>
               </a:defRPr>
             </a:pPr>
             <a:r>
-              <a:t>❌ This Won't Work:</a:t>
-            </a:r>
-          </a:p>
-          <a:p>
-            <a:pPr>
-              <a:spcBef>
-                <a:spcPts val="1000"/>
-              </a:spcBef>
-              <a:defRPr sz="2000">
-                <a:solidFill>
-                  <a:srgbClr val="1F2937"/>
-                </a:solidFill>
-                <a:latin typeface="Courier New"/>
-              </a:defRPr>
-            </a:pPr>
-            <a:r>
-              <a:t>age = input("How old are you? ")</a:t>
-            </a:r>
-          </a:p>
-          <a:p>
-            <a:pPr>
-              <a:spcBef>
-                <a:spcPts val="500"/>
-              </a:spcBef>
-              <a:defRPr sz="2000">
-                <a:solidFill>
-                  <a:srgbClr val="1F2937"/>
-                </a:solidFill>
-                <a:latin typeface="Courier New"/>
-              </a:defRPr>
-            </a:pPr>
-            <a:r>
-              <a:t>next_year = age + 1</a:t>
-            </a:r>
-          </a:p>
-          <a:p>
-            <a:pPr>
-              <a:spcBef>
-                <a:spcPts val="1000"/>
-              </a:spcBef>
-              <a:defRPr sz="1800">
-                <a:solidFill>
-                  <a:srgbClr val="EF4444"/>
-                </a:solidFill>
-                <a:latin typeface="Courier New"/>
-              </a:defRPr>
-            </a:pPr>
-            <a:r>
-              <a:t>TypeError: can only concatenate str to str</a:t>
+              <a:t>The Input Problem 🤔</a:t>
             </a:r>
           </a:p>
         </p:txBody>
@@ -4077,14 +3823,14 @@
         </p:nvSpPr>
         <p:spPr>
           <a:xfrm>
-            <a:off x="457200" y="3291840"/>
-            <a:ext cx="3931920" cy="1188720"/>
+            <a:off x="457200" y="1005840"/>
+            <a:ext cx="1828800" cy="45720"/>
           </a:xfrm>
           <a:prstGeom prst="rect">
             <a:avLst/>
           </a:prstGeom>
           <a:solidFill>
-            <a:srgbClr val="DBEAFE"/>
+            <a:srgbClr val="0066CC"/>
           </a:solidFill>
           <a:ln>
             <a:noFill/>
@@ -4105,179 +3851,102 @@
           </a:fontRef>
         </p:style>
         <p:txBody>
-          <a:bodyPr rtlCol="0" anchor="ctr" tIns="137160" lIns="182880"/>
-          <a:lstStyle/>
-          <a:p>
-            <a:pPr algn="ctr">
-              <a:defRPr sz="2000" b="1">
-                <a:solidFill>
-                  <a:srgbClr val="1F2937"/>
-                </a:solidFill>
-              </a:defRPr>
-            </a:pPr>
-            <a:r>
-              <a:t>What input() gives you:</a:t>
-            </a:r>
-          </a:p>
-          <a:p>
-            <a:pPr>
-              <a:spcBef>
-                <a:spcPts val="500"/>
-              </a:spcBef>
-              <a:defRPr sz="1800">
-                <a:solidFill>
-                  <a:srgbClr val="4B5563"/>
-                </a:solidFill>
-              </a:defRPr>
-            </a:pPr>
-            <a:r>
-              <a:t>A string (text)</a:t>
-            </a:r>
-          </a:p>
-          <a:p>
-            <a:pPr>
-              <a:spcBef>
-                <a:spcPts val="500"/>
-              </a:spcBef>
-              <a:defRPr sz="2200" b="1">
-                <a:solidFill>
-                  <a:srgbClr val="2563EB"/>
-                </a:solidFill>
-                <a:latin typeface="Courier New"/>
-              </a:defRPr>
-            </a:pPr>
-            <a:r>
-              <a:t>"25"</a:t>
-            </a:r>
-          </a:p>
-        </p:txBody>
-      </p:sp>
-      <p:sp>
-        <p:nvSpPr>
-          <p:cNvPr id="6" name="Rectangle 5"/>
-          <p:cNvSpPr/>
+          <a:bodyPr rtlCol="0" anchor="ctr"/>
+          <a:lstStyle/>
+          <a:p>
+            <a:pPr algn="ctr"/>
+          </a:p>
+        </p:txBody>
+      </p:sp>
+      <p:sp>
+        <p:nvSpPr>
+          <p:cNvPr id="6" name="TextBox 5"/>
+          <p:cNvSpPr txBox="1"/>
           <p:nvPr/>
         </p:nvSpPr>
         <p:spPr>
           <a:xfrm>
-            <a:off x="4754880" y="3291840"/>
-            <a:ext cx="3931920" cy="1188720"/>
+            <a:off x="640080" y="1371600"/>
+            <a:ext cx="10789920" cy="4572000"/>
           </a:xfrm>
           <a:prstGeom prst="rect">
             <a:avLst/>
           </a:prstGeom>
-          <a:solidFill>
-            <a:srgbClr val="DBEAFE"/>
-          </a:solidFill>
-          <a:ln>
-            <a:noFill/>
-          </a:ln>
-        </p:spPr>
-        <p:style>
-          <a:lnRef idx="1">
-            <a:schemeClr val="accent1"/>
-          </a:lnRef>
-          <a:fillRef idx="3">
-            <a:schemeClr val="accent1"/>
-          </a:fillRef>
-          <a:effectRef idx="2">
-            <a:schemeClr val="accent1"/>
-          </a:effectRef>
-          <a:fontRef idx="minor">
-            <a:schemeClr val="lt1"/>
-          </a:fontRef>
-        </p:style>
-        <p:txBody>
-          <a:bodyPr rtlCol="0" anchor="ctr" tIns="137160" lIns="182880"/>
-          <a:lstStyle/>
-          <a:p>
-            <a:pPr algn="ctr">
+          <a:noFill/>
+        </p:spPr>
+        <p:txBody>
+          <a:bodyPr wrap="square">
+            <a:spAutoFit/>
+          </a:bodyPr>
+          <a:lstStyle/>
+          <a:p>
+            <a:pPr>
+              <a:spcAft>
+                <a:spcPts val="800"/>
+              </a:spcAft>
               <a:defRPr sz="2000" b="1">
                 <a:solidFill>
-                  <a:srgbClr val="1F2937"/>
+                  <a:srgbClr val="333333"/>
                 </a:solidFill>
               </a:defRPr>
             </a:pPr>
             <a:r>
-              <a:t>What you might need:</a:t>
+              <a:t>❌ This Won't Work:</a:t>
             </a:r>
           </a:p>
           <a:p>
             <a:pPr>
-              <a:spcBef>
-                <a:spcPts val="500"/>
-              </a:spcBef>
-              <a:defRPr sz="1800">
-                <a:solidFill>
-                  <a:srgbClr val="4B5563"/>
+              <a:spcAft>
+                <a:spcPts val="800"/>
+              </a:spcAft>
+              <a:defRPr sz="2000" b="1">
+                <a:solidFill>
+                  <a:srgbClr val="333333"/>
                 </a:solidFill>
               </a:defRPr>
             </a:pPr>
             <a:r>
+              <a:t>A string (text)</a:t>
+            </a:r>
+          </a:p>
+          <a:p>
+            <a:pPr>
+              <a:spcAft>
+                <a:spcPts val="800"/>
+              </a:spcAft>
+              <a:defRPr sz="2000" b="1">
+                <a:solidFill>
+                  <a:srgbClr val="333333"/>
+                </a:solidFill>
+              </a:defRPr>
+            </a:pPr>
+            <a:r>
+              <a:t>"25"</a:t>
+            </a:r>
+          </a:p>
+          <a:p>
+            <a:pPr>
+              <a:spcAft>
+                <a:spcPts val="800"/>
+              </a:spcAft>
+              <a:defRPr sz="2000" b="1">
+                <a:solidFill>
+                  <a:srgbClr val="333333"/>
+                </a:solidFill>
+              </a:defRPr>
+            </a:pPr>
+            <a:r>
               <a:t>A number</a:t>
             </a:r>
           </a:p>
           <a:p>
             <a:pPr>
-              <a:spcBef>
-                <a:spcPts val="500"/>
-              </a:spcBef>
-              <a:defRPr sz="2200" b="1">
-                <a:solidFill>
-                  <a:srgbClr val="A855F7"/>
-                </a:solidFill>
-                <a:latin typeface="Courier New"/>
-              </a:defRPr>
-            </a:pPr>
-            <a:r>
-              <a:t>25</a:t>
-            </a:r>
-          </a:p>
-        </p:txBody>
-      </p:sp>
-      <p:sp>
-        <p:nvSpPr>
-          <p:cNvPr id="7" name="Rectangle 6"/>
-          <p:cNvSpPr/>
-          <p:nvPr/>
-        </p:nvSpPr>
-        <p:spPr>
-          <a:xfrm>
-            <a:off x="457200" y="4754880"/>
-            <a:ext cx="8229600" cy="822960"/>
-          </a:xfrm>
-          <a:prstGeom prst="rect">
-            <a:avLst/>
-          </a:prstGeom>
-          <a:solidFill>
-            <a:srgbClr val="2563EB"/>
-          </a:solidFill>
-          <a:ln>
-            <a:noFill/>
-          </a:ln>
-        </p:spPr>
-        <p:style>
-          <a:lnRef idx="1">
-            <a:schemeClr val="accent1"/>
-          </a:lnRef>
-          <a:fillRef idx="3">
-            <a:schemeClr val="accent1"/>
-          </a:fillRef>
-          <a:effectRef idx="2">
-            <a:schemeClr val="accent1"/>
-          </a:effectRef>
-          <a:fontRef idx="minor">
-            <a:schemeClr val="lt1"/>
-          </a:fontRef>
-        </p:style>
-        <p:txBody>
-          <a:bodyPr rtlCol="0" anchor="t"/>
-          <a:lstStyle/>
-          <a:p>
-            <a:pPr algn="ctr">
-              <a:defRPr sz="2800" b="1">
-                <a:solidFill>
-                  <a:srgbClr val="FFFFFF"/>
+              <a:spcAft>
+                <a:spcPts val="800"/>
+              </a:spcAft>
+              <a:defRPr sz="2000" b="1">
+                <a:solidFill>
+                  <a:srgbClr val="333333"/>
                 </a:solidFill>
               </a:defRPr>
             </a:pPr>
@@ -4298,14 +3967,6 @@
 <file path=ppt/slides/slide4.xml><?xml version="1.0" encoding="utf-8"?>
 <p:sld xmlns:a="http://schemas.openxmlformats.org/drawingml/2006/main" xmlns:p="http://schemas.openxmlformats.org/presentationml/2006/main" xmlns:r="http://schemas.openxmlformats.org/officeDocument/2006/relationships">
   <p:cSld>
-    <p:bg>
-      <p:bgPr>
-        <a:solidFill>
-          <a:srgbClr val="FFFFFF"/>
-        </a:solidFill>
-        <a:effectLst/>
-      </p:bgPr>
-    </p:bg>
     <p:spTree>
       <p:nvGrpSpPr>
         <p:cNvPr id="1" name=""/>
@@ -4315,55 +3976,20 @@
       <p:grpSpPr/>
       <p:sp>
         <p:nvSpPr>
-          <p:cNvPr id="2" name="TextBox 1"/>
-          <p:cNvSpPr txBox="1"/>
-          <p:nvPr/>
-        </p:nvSpPr>
-        <p:spPr>
-          <a:xfrm>
-            <a:off x="457200" y="274320"/>
-            <a:ext cx="8229600" cy="731520"/>
-          </a:xfrm>
-          <a:prstGeom prst="rect">
-            <a:avLst/>
-          </a:prstGeom>
-          <a:noFill/>
-        </p:spPr>
-        <p:txBody>
-          <a:bodyPr wrap="none">
-            <a:spAutoFit/>
-          </a:bodyPr>
-          <a:lstStyle/>
-          <a:p>
-            <a:pPr>
-              <a:defRPr sz="4400" b="1">
-                <a:solidFill>
-                  <a:srgbClr val="1F2937"/>
-                </a:solidFill>
-              </a:defRPr>
-            </a:pPr>
-            <a:r>
-              <a:t>Type Conversion 🔄</a:t>
-            </a:r>
-          </a:p>
-        </p:txBody>
-      </p:sp>
-      <p:sp>
-        <p:nvSpPr>
-          <p:cNvPr id="3" name="Rectangle 2"/>
+          <p:cNvPr id="2" name="Rectangle 1"/>
           <p:cNvSpPr/>
           <p:nvPr/>
         </p:nvSpPr>
         <p:spPr>
           <a:xfrm>
-            <a:off x="457200" y="914400"/>
-            <a:ext cx="1371600" cy="45720"/>
+            <a:off x="0" y="0"/>
+            <a:ext cx="12191695" cy="6858000"/>
           </a:xfrm>
           <a:prstGeom prst="rect">
             <a:avLst/>
           </a:prstGeom>
           <a:solidFill>
-            <a:srgbClr val="2563EB"/>
+            <a:srgbClr val="FFFFFF"/>
           </a:solidFill>
           <a:ln>
             <a:noFill/>
@@ -4393,55 +4019,20 @@
       </p:sp>
       <p:sp>
         <p:nvSpPr>
-          <p:cNvPr id="4" name="TextBox 3"/>
-          <p:cNvSpPr txBox="1"/>
-          <p:nvPr/>
-        </p:nvSpPr>
-        <p:spPr>
-          <a:xfrm>
-            <a:off x="457200" y="1280160"/>
-            <a:ext cx="8229600" cy="457200"/>
-          </a:xfrm>
-          <a:prstGeom prst="rect">
-            <a:avLst/>
-          </a:prstGeom>
-          <a:noFill/>
-        </p:spPr>
-        <p:txBody>
-          <a:bodyPr wrap="none">
-            <a:spAutoFit/>
-          </a:bodyPr>
-          <a:lstStyle/>
-          <a:p>
-            <a:pPr>
-              <a:defRPr sz="2200">
-                <a:solidFill>
-                  <a:srgbClr val="4B5563"/>
-                </a:solidFill>
-              </a:defRPr>
-            </a:pPr>
-            <a:r>
-              <a:t>Converting data from one type to another</a:t>
-            </a:r>
-          </a:p>
-        </p:txBody>
-      </p:sp>
-      <p:sp>
-        <p:nvSpPr>
-          <p:cNvPr id="5" name="Rectangle 4"/>
+          <p:cNvPr id="3" name="Rectangle 2"/>
           <p:cNvSpPr/>
           <p:nvPr/>
         </p:nvSpPr>
         <p:spPr>
           <a:xfrm>
-            <a:off x="457200" y="1920240"/>
-            <a:ext cx="2651760" cy="1371600"/>
+            <a:off x="0" y="0"/>
+            <a:ext cx="12191695" cy="137160"/>
           </a:xfrm>
           <a:prstGeom prst="rect">
             <a:avLst/>
           </a:prstGeom>
           <a:solidFill>
-            <a:srgbClr val="EFF6FF"/>
+            <a:srgbClr val="0066CC"/>
           </a:solidFill>
           <a:ln>
             <a:noFill/>
@@ -4462,85 +4053,64 @@
           </a:fontRef>
         </p:style>
         <p:txBody>
-          <a:bodyPr rtlCol="0" anchor="ctr" tIns="137160" lIns="182880"/>
-          <a:lstStyle/>
-          <a:p>
-            <a:pPr algn="ctr">
-              <a:defRPr sz="2200" b="1">
-                <a:solidFill>
-                  <a:srgbClr val="2563EB"/>
+          <a:bodyPr rtlCol="0" anchor="ctr"/>
+          <a:lstStyle/>
+          <a:p>
+            <a:pPr algn="ctr"/>
+          </a:p>
+        </p:txBody>
+      </p:sp>
+      <p:sp>
+        <p:nvSpPr>
+          <p:cNvPr id="4" name="TextBox 3"/>
+          <p:cNvSpPr txBox="1"/>
+          <p:nvPr/>
+        </p:nvSpPr>
+        <p:spPr>
+          <a:xfrm>
+            <a:off x="457200" y="365760"/>
+            <a:ext cx="10972800" cy="731520"/>
+          </a:xfrm>
+          <a:prstGeom prst="rect">
+            <a:avLst/>
+          </a:prstGeom>
+          <a:noFill/>
+        </p:spPr>
+        <p:txBody>
+          <a:bodyPr wrap="none">
+            <a:spAutoFit/>
+          </a:bodyPr>
+          <a:lstStyle/>
+          <a:p>
+            <a:pPr>
+              <a:defRPr sz="4000" b="1">
+                <a:solidFill>
+                  <a:srgbClr val="003366"/>
                 </a:solidFill>
               </a:defRPr>
             </a:pPr>
             <a:r>
-              <a:t>int()</a:t>
-            </a:r>
-          </a:p>
-          <a:p>
-            <a:pPr>
-              <a:spcBef>
-                <a:spcPts val="500"/>
-              </a:spcBef>
-              <a:defRPr sz="1600">
-                <a:solidFill>
-                  <a:srgbClr val="4B5563"/>
-                </a:solidFill>
-              </a:defRPr>
-            </a:pPr>
-            <a:r>
-              <a:t>Convert to integer</a:t>
-            </a:r>
-          </a:p>
-          <a:p>
-            <a:pPr>
-              <a:spcBef>
-                <a:spcPts val="1000"/>
-              </a:spcBef>
-              <a:defRPr sz="1600">
-                <a:solidFill>
-                  <a:srgbClr val="1F2937"/>
-                </a:solidFill>
-                <a:latin typeface="Courier New"/>
-              </a:defRPr>
-            </a:pPr>
-            <a:r>
-              <a:t>int("25") → 25</a:t>
-            </a:r>
-          </a:p>
-          <a:p>
-            <a:pPr>
-              <a:spcBef>
-                <a:spcPts val="300"/>
-              </a:spcBef>
-              <a:defRPr sz="1600">
-                <a:solidFill>
-                  <a:srgbClr val="1F2937"/>
-                </a:solidFill>
-                <a:latin typeface="Courier New"/>
-              </a:defRPr>
-            </a:pPr>
-            <a:r>
-              <a:t>int(3.9) → 3</a:t>
-            </a:r>
-          </a:p>
-        </p:txBody>
-      </p:sp>
-      <p:sp>
-        <p:nvSpPr>
-          <p:cNvPr id="6" name="Rectangle 5"/>
+              <a:t>Type Conversion 🔄</a:t>
+            </a:r>
+          </a:p>
+        </p:txBody>
+      </p:sp>
+      <p:sp>
+        <p:nvSpPr>
+          <p:cNvPr id="5" name="Rectangle 4"/>
           <p:cNvSpPr/>
           <p:nvPr/>
         </p:nvSpPr>
         <p:spPr>
           <a:xfrm>
-            <a:off x="3246120" y="1920240"/>
-            <a:ext cx="2651760" cy="1371600"/>
+            <a:off x="457200" y="1005840"/>
+            <a:ext cx="1828800" cy="45720"/>
           </a:xfrm>
           <a:prstGeom prst="rect">
             <a:avLst/>
           </a:prstGeom>
           <a:solidFill>
-            <a:srgbClr val="EFF6FF"/>
+            <a:srgbClr val="0066CC"/>
           </a:solidFill>
           <a:ln>
             <a:noFill/>
@@ -4561,127 +4131,132 @@
           </a:fontRef>
         </p:style>
         <p:txBody>
-          <a:bodyPr rtlCol="0" anchor="ctr" tIns="137160" lIns="182880"/>
-          <a:lstStyle/>
-          <a:p>
-            <a:pPr algn="ctr">
-              <a:defRPr sz="2200" b="1">
-                <a:solidFill>
-                  <a:srgbClr val="2563EB"/>
-                </a:solidFill>
-              </a:defRPr>
-            </a:pPr>
-            <a:r>
-              <a:t>float()</a:t>
-            </a:r>
-          </a:p>
-          <a:p>
-            <a:pPr>
-              <a:spcBef>
-                <a:spcPts val="500"/>
-              </a:spcBef>
-              <a:defRPr sz="1600">
-                <a:solidFill>
-                  <a:srgbClr val="4B5563"/>
-                </a:solidFill>
-              </a:defRPr>
-            </a:pPr>
-            <a:r>
-              <a:t>Convert to decimal</a:t>
-            </a:r>
-          </a:p>
-          <a:p>
-            <a:pPr>
-              <a:spcBef>
-                <a:spcPts val="1000"/>
-              </a:spcBef>
-              <a:defRPr sz="1600">
-                <a:solidFill>
-                  <a:srgbClr val="1F2937"/>
-                </a:solidFill>
-                <a:latin typeface="Courier New"/>
-              </a:defRPr>
-            </a:pPr>
-            <a:r>
-              <a:t>float("3.14") → 3.14</a:t>
-            </a:r>
-          </a:p>
-          <a:p>
-            <a:pPr>
-              <a:spcBef>
-                <a:spcPts val="300"/>
-              </a:spcBef>
-              <a:defRPr sz="1600">
-                <a:solidFill>
-                  <a:srgbClr val="1F2937"/>
-                </a:solidFill>
-                <a:latin typeface="Courier New"/>
-              </a:defRPr>
-            </a:pPr>
-            <a:r>
-              <a:t>float(5) → 5.0</a:t>
-            </a:r>
-          </a:p>
-        </p:txBody>
-      </p:sp>
-      <p:sp>
-        <p:nvSpPr>
-          <p:cNvPr id="7" name="Rectangle 6"/>
-          <p:cNvSpPr/>
+          <a:bodyPr rtlCol="0" anchor="ctr"/>
+          <a:lstStyle/>
+          <a:p>
+            <a:pPr algn="ctr"/>
+          </a:p>
+        </p:txBody>
+      </p:sp>
+      <p:sp>
+        <p:nvSpPr>
+          <p:cNvPr id="6" name="TextBox 5"/>
+          <p:cNvSpPr txBox="1"/>
           <p:nvPr/>
         </p:nvSpPr>
         <p:spPr>
           <a:xfrm>
-            <a:off x="6035040" y="1920240"/>
-            <a:ext cx="2651760" cy="1371600"/>
+            <a:off x="640080" y="1371600"/>
+            <a:ext cx="10789920" cy="4572000"/>
           </a:xfrm>
           <a:prstGeom prst="rect">
             <a:avLst/>
           </a:prstGeom>
-          <a:solidFill>
-            <a:srgbClr val="EFF6FF"/>
-          </a:solidFill>
-          <a:ln>
-            <a:noFill/>
-          </a:ln>
-        </p:spPr>
-        <p:style>
-          <a:lnRef idx="1">
-            <a:schemeClr val="accent1"/>
-          </a:lnRef>
-          <a:fillRef idx="3">
-            <a:schemeClr val="accent1"/>
-          </a:fillRef>
-          <a:effectRef idx="2">
-            <a:schemeClr val="accent1"/>
-          </a:effectRef>
-          <a:fontRef idx="minor">
-            <a:schemeClr val="lt1"/>
-          </a:fontRef>
-        </p:style>
-        <p:txBody>
-          <a:bodyPr rtlCol="0" anchor="ctr" tIns="137160" lIns="182880"/>
-          <a:lstStyle/>
-          <a:p>
-            <a:pPr algn="ctr">
-              <a:defRPr sz="2200" b="1">
-                <a:solidFill>
-                  <a:srgbClr val="2563EB"/>
+          <a:noFill/>
+        </p:spPr>
+        <p:txBody>
+          <a:bodyPr wrap="square">
+            <a:spAutoFit/>
+          </a:bodyPr>
+          <a:lstStyle/>
+          <a:p>
+            <a:pPr>
+              <a:spcAft>
+                <a:spcPts val="800"/>
+              </a:spcAft>
+              <a:defRPr sz="2000" b="1">
+                <a:solidFill>
+                  <a:srgbClr val="333333"/>
                 </a:solidFill>
               </a:defRPr>
             </a:pPr>
             <a:r>
+              <a:t>Converting data from one type to another</a:t>
+            </a:r>
+          </a:p>
+          <a:p>
+            <a:pPr>
+              <a:spcAft>
+                <a:spcPts val="800"/>
+              </a:spcAft>
+              <a:defRPr sz="2000" b="1">
+                <a:solidFill>
+                  <a:srgbClr val="333333"/>
+                </a:solidFill>
+              </a:defRPr>
+            </a:pPr>
+            <a:r>
+              <a:t>int()</a:t>
+            </a:r>
+          </a:p>
+          <a:p>
+            <a:pPr>
+              <a:spcAft>
+                <a:spcPts val="800"/>
+              </a:spcAft>
+              <a:defRPr sz="2000" b="1">
+                <a:solidFill>
+                  <a:srgbClr val="333333"/>
+                </a:solidFill>
+              </a:defRPr>
+            </a:pPr>
+            <a:r>
+              <a:t>Convert to integer</a:t>
+            </a:r>
+          </a:p>
+          <a:p>
+            <a:pPr>
+              <a:spcAft>
+                <a:spcPts val="800"/>
+              </a:spcAft>
+              <a:defRPr sz="2000" b="1">
+                <a:solidFill>
+                  <a:srgbClr val="333333"/>
+                </a:solidFill>
+              </a:defRPr>
+            </a:pPr>
+            <a:r>
+              <a:t>float()</a:t>
+            </a:r>
+          </a:p>
+          <a:p>
+            <a:pPr>
+              <a:spcAft>
+                <a:spcPts val="800"/>
+              </a:spcAft>
+              <a:defRPr sz="2000" b="1">
+                <a:solidFill>
+                  <a:srgbClr val="333333"/>
+                </a:solidFill>
+              </a:defRPr>
+            </a:pPr>
+            <a:r>
+              <a:t>Convert to decimal</a:t>
+            </a:r>
+          </a:p>
+          <a:p>
+            <a:pPr>
+              <a:spcAft>
+                <a:spcPts val="800"/>
+              </a:spcAft>
+              <a:defRPr sz="2000" b="1">
+                <a:solidFill>
+                  <a:srgbClr val="333333"/>
+                </a:solidFill>
+              </a:defRPr>
+            </a:pPr>
+            <a:r>
               <a:t>str()</a:t>
             </a:r>
           </a:p>
           <a:p>
             <a:pPr>
-              <a:spcBef>
-                <a:spcPts val="500"/>
-              </a:spcBef>
-              <a:defRPr sz="1600">
-                <a:solidFill>
-                  <a:srgbClr val="4B5563"/>
+              <a:spcAft>
+                <a:spcPts val="800"/>
+              </a:spcAft>
+              <a:defRPr sz="2000" b="1">
+                <a:solidFill>
+                  <a:srgbClr val="333333"/>
                 </a:solidFill>
               </a:defRPr>
             </a:pPr>
@@ -4691,150 +4266,17 @@
           </a:p>
           <a:p>
             <a:pPr>
-              <a:spcBef>
-                <a:spcPts val="1000"/>
-              </a:spcBef>
-              <a:defRPr sz="1600">
-                <a:solidFill>
-                  <a:srgbClr val="1F2937"/>
-                </a:solidFill>
-                <a:latin typeface="Courier New"/>
+              <a:spcAft>
+                <a:spcPts val="800"/>
+              </a:spcAft>
+              <a:defRPr sz="2000" b="1">
+                <a:solidFill>
+                  <a:srgbClr val="333333"/>
+                </a:solidFill>
               </a:defRPr>
             </a:pPr>
             <a:r>
-              <a:t>str(25) → "25"</a:t>
-            </a:r>
-          </a:p>
-          <a:p>
-            <a:pPr>
-              <a:spcBef>
-                <a:spcPts val="300"/>
-              </a:spcBef>
-              <a:defRPr sz="1600">
-                <a:solidFill>
-                  <a:srgbClr val="1F2937"/>
-                </a:solidFill>
-                <a:latin typeface="Courier New"/>
-              </a:defRPr>
-            </a:pPr>
-            <a:r>
-              <a:t>str(3.14) → "3.14"</a:t>
-            </a:r>
-          </a:p>
-        </p:txBody>
-      </p:sp>
-      <p:sp>
-        <p:nvSpPr>
-          <p:cNvPr id="8" name="Rectangle 7"/>
-          <p:cNvSpPr/>
-          <p:nvPr/>
-        </p:nvSpPr>
-        <p:spPr>
-          <a:xfrm>
-            <a:off x="457200" y="3474720"/>
-            <a:ext cx="8229600" cy="2103120"/>
-          </a:xfrm>
-          <a:prstGeom prst="rect">
-            <a:avLst/>
-          </a:prstGeom>
-          <a:solidFill>
-            <a:srgbClr val="F0FDF4"/>
-          </a:solidFill>
-          <a:ln>
-            <a:noFill/>
-          </a:ln>
-        </p:spPr>
-        <p:style>
-          <a:lnRef idx="1">
-            <a:schemeClr val="accent1"/>
-          </a:lnRef>
-          <a:fillRef idx="3">
-            <a:schemeClr val="accent1"/>
-          </a:fillRef>
-          <a:effectRef idx="2">
-            <a:schemeClr val="accent1"/>
-          </a:effectRef>
-          <a:fontRef idx="minor">
-            <a:schemeClr val="lt1"/>
-          </a:fontRef>
-        </p:style>
-        <p:txBody>
-          <a:bodyPr rtlCol="0" anchor="ctr" tIns="182880" lIns="274320"/>
-          <a:lstStyle/>
-          <a:p>
-            <a:pPr algn="ctr">
-              <a:defRPr sz="2600" b="1">
-                <a:solidFill>
-                  <a:srgbClr val="22C55E"/>
-                </a:solidFill>
-              </a:defRPr>
-            </a:pPr>
-            <a:r>
               <a:t>✓ Now This Works:</a:t>
-            </a:r>
-          </a:p>
-          <a:p>
-            <a:pPr>
-              <a:spcBef>
-                <a:spcPts val="1000"/>
-              </a:spcBef>
-              <a:defRPr sz="2000">
-                <a:solidFill>
-                  <a:srgbClr val="1F2937"/>
-                </a:solidFill>
-                <a:latin typeface="Courier New"/>
-              </a:defRPr>
-            </a:pPr>
-            <a:r>
-              <a:t>age = input("How old are you? ")</a:t>
-            </a:r>
-          </a:p>
-          <a:p>
-            <a:pPr>
-              <a:spcBef>
-                <a:spcPts val="500"/>
-              </a:spcBef>
-              <a:defRPr sz="2000">
-                <a:solidFill>
-                  <a:srgbClr val="1F2937"/>
-                </a:solidFill>
-                <a:latin typeface="Courier New"/>
-              </a:defRPr>
-            </a:pPr>
-            <a:r>
-              <a:t>age = int(age)  # Convert to integer</a:t>
-            </a:r>
-          </a:p>
-          <a:p>
-            <a:pPr>
-              <a:spcBef>
-                <a:spcPts val="500"/>
-              </a:spcBef>
-              <a:defRPr sz="2000">
-                <a:solidFill>
-                  <a:srgbClr val="1F2937"/>
-                </a:solidFill>
-                <a:latin typeface="Courier New"/>
-              </a:defRPr>
-            </a:pPr>
-            <a:r>
-              <a:t>next_year = age + 1</a:t>
-            </a:r>
-          </a:p>
-          <a:p>
-            <a:pPr>
-              <a:spcBef>
-                <a:spcPts val="500"/>
-              </a:spcBef>
-              <a:defRPr sz="2000">
-                <a:solidFill>
-                  <a:srgbClr val="1F2937"/>
-                </a:solidFill>
-                <a:latin typeface="Courier New"/>
-              </a:defRPr>
-            </a:pPr>
-            <a:r>
-              <a:t>print("Next year you'll be", next_year)</a:t>
             </a:r>
           </a:p>
         </p:txBody>
@@ -4850,14 +4292,6 @@
 <file path=ppt/slides/slide5.xml><?xml version="1.0" encoding="utf-8"?>
 <p:sld xmlns:a="http://schemas.openxmlformats.org/drawingml/2006/main" xmlns:p="http://schemas.openxmlformats.org/presentationml/2006/main" xmlns:r="http://schemas.openxmlformats.org/officeDocument/2006/relationships">
   <p:cSld>
-    <p:bg>
-      <p:bgPr>
-        <a:solidFill>
-          <a:srgbClr val="EFF6FF"/>
-        </a:solidFill>
-        <a:effectLst/>
-      </p:bgPr>
-    </p:bg>
     <p:spTree>
       <p:nvGrpSpPr>
         <p:cNvPr id="1" name=""/>
@@ -4867,279 +4301,14 @@
       <p:grpSpPr/>
       <p:sp>
         <p:nvSpPr>
-          <p:cNvPr id="2" name="TextBox 1"/>
-          <p:cNvSpPr txBox="1"/>
-          <p:nvPr/>
-        </p:nvSpPr>
-        <p:spPr>
-          <a:xfrm>
-            <a:off x="457200" y="274320"/>
-            <a:ext cx="8229600" cy="731520"/>
-          </a:xfrm>
-          <a:prstGeom prst="rect">
-            <a:avLst/>
-          </a:prstGeom>
-          <a:noFill/>
-        </p:spPr>
-        <p:txBody>
-          <a:bodyPr wrap="none">
-            <a:spAutoFit/>
-          </a:bodyPr>
-          <a:lstStyle/>
-          <a:p>
-            <a:pPr>
-              <a:defRPr sz="4400" b="1">
-                <a:solidFill>
-                  <a:srgbClr val="1F2937"/>
-                </a:solidFill>
-              </a:defRPr>
-            </a:pPr>
-            <a:r>
-              <a:t>Conversion Shortcut 🚀</a:t>
-            </a:r>
-          </a:p>
-        </p:txBody>
-      </p:sp>
-      <p:sp>
-        <p:nvSpPr>
-          <p:cNvPr id="3" name="Rectangle 2"/>
+          <p:cNvPr id="2" name="Rectangle 1"/>
           <p:cNvSpPr/>
           <p:nvPr/>
         </p:nvSpPr>
         <p:spPr>
           <a:xfrm>
-            <a:off x="457200" y="914400"/>
-            <a:ext cx="1371600" cy="45720"/>
-          </a:xfrm>
-          <a:prstGeom prst="rect">
-            <a:avLst/>
-          </a:prstGeom>
-          <a:solidFill>
-            <a:srgbClr val="2563EB"/>
-          </a:solidFill>
-          <a:ln>
-            <a:noFill/>
-          </a:ln>
-        </p:spPr>
-        <p:style>
-          <a:lnRef idx="1">
-            <a:schemeClr val="accent1"/>
-          </a:lnRef>
-          <a:fillRef idx="3">
-            <a:schemeClr val="accent1"/>
-          </a:fillRef>
-          <a:effectRef idx="2">
-            <a:schemeClr val="accent1"/>
-          </a:effectRef>
-          <a:fontRef idx="minor">
-            <a:schemeClr val="lt1"/>
-          </a:fontRef>
-        </p:style>
-        <p:txBody>
-          <a:bodyPr rtlCol="0" anchor="ctr"/>
-          <a:lstStyle/>
-          <a:p>
-            <a:pPr algn="ctr"/>
-          </a:p>
-        </p:txBody>
-      </p:sp>
-      <p:sp>
-        <p:nvSpPr>
-          <p:cNvPr id="4" name="TextBox 3"/>
-          <p:cNvSpPr txBox="1"/>
-          <p:nvPr/>
-        </p:nvSpPr>
-        <p:spPr>
-          <a:xfrm>
-            <a:off x="457200" y="1280160"/>
-            <a:ext cx="8229600" cy="457200"/>
-          </a:xfrm>
-          <a:prstGeom prst="rect">
-            <a:avLst/>
-          </a:prstGeom>
-          <a:noFill/>
-        </p:spPr>
-        <p:txBody>
-          <a:bodyPr wrap="none">
-            <a:spAutoFit/>
-          </a:bodyPr>
-          <a:lstStyle/>
-          <a:p>
-            <a:pPr>
-              <a:defRPr sz="2200">
-                <a:solidFill>
-                  <a:srgbClr val="4B5563"/>
-                </a:solidFill>
-              </a:defRPr>
-            </a:pPr>
-            <a:r>
-              <a:t>You can combine input() with type conversion in one line!</a:t>
-            </a:r>
-          </a:p>
-        </p:txBody>
-      </p:sp>
-      <p:sp>
-        <p:nvSpPr>
-          <p:cNvPr id="5" name="Rectangle 4"/>
-          <p:cNvSpPr/>
-          <p:nvPr/>
-        </p:nvSpPr>
-        <p:spPr>
-          <a:xfrm>
-            <a:off x="457200" y="2011680"/>
-            <a:ext cx="3931920" cy="1188720"/>
-          </a:xfrm>
-          <a:prstGeom prst="rect">
-            <a:avLst/>
-          </a:prstGeom>
-          <a:solidFill>
-            <a:srgbClr val="FEFCE8"/>
-          </a:solidFill>
-          <a:ln>
-            <a:noFill/>
-          </a:ln>
-        </p:spPr>
-        <p:style>
-          <a:lnRef idx="1">
-            <a:schemeClr val="accent1"/>
-          </a:lnRef>
-          <a:fillRef idx="3">
-            <a:schemeClr val="accent1"/>
-          </a:fillRef>
-          <a:effectRef idx="2">
-            <a:schemeClr val="accent1"/>
-          </a:effectRef>
-          <a:fontRef idx="minor">
-            <a:schemeClr val="lt1"/>
-          </a:fontRef>
-        </p:style>
-        <p:txBody>
-          <a:bodyPr rtlCol="0" anchor="ctr" tIns="137160" lIns="182880"/>
-          <a:lstStyle/>
-          <a:p>
-            <a:pPr algn="ctr">
-              <a:defRPr sz="2200" b="1">
-                <a:solidFill>
-                  <a:srgbClr val="1F2937"/>
-                </a:solidFill>
-              </a:defRPr>
-            </a:pPr>
-            <a:r>
-              <a:t>Long Way:</a:t>
-            </a:r>
-          </a:p>
-          <a:p>
-            <a:pPr>
-              <a:spcBef>
-                <a:spcPts val="1000"/>
-              </a:spcBef>
-              <a:defRPr sz="1800">
-                <a:solidFill>
-                  <a:srgbClr val="1F2937"/>
-                </a:solidFill>
-                <a:latin typeface="Courier New"/>
-              </a:defRPr>
-            </a:pPr>
-            <a:r>
-              <a:t>age = input("Age? ")</a:t>
-            </a:r>
-          </a:p>
-          <a:p>
-            <a:pPr>
-              <a:spcBef>
-                <a:spcPts val="500"/>
-              </a:spcBef>
-              <a:defRPr sz="1800">
-                <a:solidFill>
-                  <a:srgbClr val="1F2937"/>
-                </a:solidFill>
-                <a:latin typeface="Courier New"/>
-              </a:defRPr>
-            </a:pPr>
-            <a:r>
-              <a:t>age = int(age)</a:t>
-            </a:r>
-          </a:p>
-        </p:txBody>
-      </p:sp>
-      <p:sp>
-        <p:nvSpPr>
-          <p:cNvPr id="6" name="Rectangle 5"/>
-          <p:cNvSpPr/>
-          <p:nvPr/>
-        </p:nvSpPr>
-        <p:spPr>
-          <a:xfrm>
-            <a:off x="4754880" y="2011680"/>
-            <a:ext cx="3931920" cy="1188720"/>
-          </a:xfrm>
-          <a:prstGeom prst="rect">
-            <a:avLst/>
-          </a:prstGeom>
-          <a:solidFill>
-            <a:srgbClr val="F0FDF4"/>
-          </a:solidFill>
-          <a:ln>
-            <a:noFill/>
-          </a:ln>
-        </p:spPr>
-        <p:style>
-          <a:lnRef idx="1">
-            <a:schemeClr val="accent1"/>
-          </a:lnRef>
-          <a:fillRef idx="3">
-            <a:schemeClr val="accent1"/>
-          </a:fillRef>
-          <a:effectRef idx="2">
-            <a:schemeClr val="accent1"/>
-          </a:effectRef>
-          <a:fontRef idx="minor">
-            <a:schemeClr val="lt1"/>
-          </a:fontRef>
-        </p:style>
-        <p:txBody>
-          <a:bodyPr rtlCol="0" anchor="ctr" tIns="137160" lIns="182880"/>
-          <a:lstStyle/>
-          <a:p>
-            <a:pPr algn="ctr">
-              <a:defRPr sz="2200" b="1">
-                <a:solidFill>
-                  <a:srgbClr val="22C55E"/>
-                </a:solidFill>
-              </a:defRPr>
-            </a:pPr>
-            <a:r>
-              <a:t>Short Way:</a:t>
-            </a:r>
-          </a:p>
-          <a:p>
-            <a:pPr>
-              <a:spcBef>
-                <a:spcPts val="1000"/>
-              </a:spcBef>
-              <a:defRPr sz="1800">
-                <a:solidFill>
-                  <a:srgbClr val="1F2937"/>
-                </a:solidFill>
-                <a:latin typeface="Courier New"/>
-              </a:defRPr>
-            </a:pPr>
-            <a:r>
-              <a:t>age = int(input("Age? "))</a:t>
-            </a:r>
-          </a:p>
-        </p:txBody>
-      </p:sp>
-      <p:sp>
-        <p:nvSpPr>
-          <p:cNvPr id="7" name="Rectangle 6"/>
-          <p:cNvSpPr/>
-          <p:nvPr/>
-        </p:nvSpPr>
-        <p:spPr>
-          <a:xfrm>
-            <a:off x="457200" y="3474720"/>
-            <a:ext cx="8229600" cy="2103120"/>
+            <a:off x="0" y="0"/>
+            <a:ext cx="12191695" cy="6858000"/>
           </a:xfrm>
           <a:prstGeom prst="rect">
             <a:avLst/>
@@ -5147,10 +4316,8 @@
           <a:solidFill>
             <a:srgbClr val="FFFFFF"/>
           </a:solidFill>
-          <a:ln w="25400">
-            <a:solidFill>
-              <a:srgbClr val="3B82F6"/>
-            </a:solidFill>
+          <a:ln>
+            <a:noFill/>
           </a:ln>
         </p:spPr>
         <p:style>
@@ -5168,82 +4335,213 @@
           </a:fontRef>
         </p:style>
         <p:txBody>
-          <a:bodyPr rtlCol="0" anchor="ctr" tIns="182880" lIns="274320"/>
-          <a:lstStyle/>
-          <a:p>
-            <a:pPr algn="ctr">
-              <a:defRPr sz="2600" b="1">
-                <a:solidFill>
-                  <a:srgbClr val="1F2937"/>
+          <a:bodyPr rtlCol="0" anchor="ctr"/>
+          <a:lstStyle/>
+          <a:p>
+            <a:pPr algn="ctr"/>
+          </a:p>
+        </p:txBody>
+      </p:sp>
+      <p:sp>
+        <p:nvSpPr>
+          <p:cNvPr id="3" name="Rectangle 2"/>
+          <p:cNvSpPr/>
+          <p:nvPr/>
+        </p:nvSpPr>
+        <p:spPr>
+          <a:xfrm>
+            <a:off x="0" y="0"/>
+            <a:ext cx="12191695" cy="137160"/>
+          </a:xfrm>
+          <a:prstGeom prst="rect">
+            <a:avLst/>
+          </a:prstGeom>
+          <a:solidFill>
+            <a:srgbClr val="0066CC"/>
+          </a:solidFill>
+          <a:ln>
+            <a:noFill/>
+          </a:ln>
+        </p:spPr>
+        <p:style>
+          <a:lnRef idx="1">
+            <a:schemeClr val="accent1"/>
+          </a:lnRef>
+          <a:fillRef idx="3">
+            <a:schemeClr val="accent1"/>
+          </a:fillRef>
+          <a:effectRef idx="2">
+            <a:schemeClr val="accent1"/>
+          </a:effectRef>
+          <a:fontRef idx="minor">
+            <a:schemeClr val="lt1"/>
+          </a:fontRef>
+        </p:style>
+        <p:txBody>
+          <a:bodyPr rtlCol="0" anchor="ctr"/>
+          <a:lstStyle/>
+          <a:p>
+            <a:pPr algn="ctr"/>
+          </a:p>
+        </p:txBody>
+      </p:sp>
+      <p:sp>
+        <p:nvSpPr>
+          <p:cNvPr id="4" name="TextBox 3"/>
+          <p:cNvSpPr txBox="1"/>
+          <p:nvPr/>
+        </p:nvSpPr>
+        <p:spPr>
+          <a:xfrm>
+            <a:off x="457200" y="365760"/>
+            <a:ext cx="10972800" cy="731520"/>
+          </a:xfrm>
+          <a:prstGeom prst="rect">
+            <a:avLst/>
+          </a:prstGeom>
+          <a:noFill/>
+        </p:spPr>
+        <p:txBody>
+          <a:bodyPr wrap="none">
+            <a:spAutoFit/>
+          </a:bodyPr>
+          <a:lstStyle/>
+          <a:p>
+            <a:pPr>
+              <a:defRPr sz="4000" b="1">
+                <a:solidFill>
+                  <a:srgbClr val="003366"/>
                 </a:solidFill>
               </a:defRPr>
             </a:pPr>
             <a:r>
+              <a:t>Conversion Shortcut</a:t>
+            </a:r>
+          </a:p>
+        </p:txBody>
+      </p:sp>
+      <p:sp>
+        <p:nvSpPr>
+          <p:cNvPr id="5" name="Rectangle 4"/>
+          <p:cNvSpPr/>
+          <p:nvPr/>
+        </p:nvSpPr>
+        <p:spPr>
+          <a:xfrm>
+            <a:off x="457200" y="1005840"/>
+            <a:ext cx="1828800" cy="45720"/>
+          </a:xfrm>
+          <a:prstGeom prst="rect">
+            <a:avLst/>
+          </a:prstGeom>
+          <a:solidFill>
+            <a:srgbClr val="0066CC"/>
+          </a:solidFill>
+          <a:ln>
+            <a:noFill/>
+          </a:ln>
+        </p:spPr>
+        <p:style>
+          <a:lnRef idx="1">
+            <a:schemeClr val="accent1"/>
+          </a:lnRef>
+          <a:fillRef idx="3">
+            <a:schemeClr val="accent1"/>
+          </a:fillRef>
+          <a:effectRef idx="2">
+            <a:schemeClr val="accent1"/>
+          </a:effectRef>
+          <a:fontRef idx="minor">
+            <a:schemeClr val="lt1"/>
+          </a:fontRef>
+        </p:style>
+        <p:txBody>
+          <a:bodyPr rtlCol="0" anchor="ctr"/>
+          <a:lstStyle/>
+          <a:p>
+            <a:pPr algn="ctr"/>
+          </a:p>
+        </p:txBody>
+      </p:sp>
+      <p:sp>
+        <p:nvSpPr>
+          <p:cNvPr id="6" name="TextBox 5"/>
+          <p:cNvSpPr txBox="1"/>
+          <p:nvPr/>
+        </p:nvSpPr>
+        <p:spPr>
+          <a:xfrm>
+            <a:off x="640080" y="1371600"/>
+            <a:ext cx="10789920" cy="4572000"/>
+          </a:xfrm>
+          <a:prstGeom prst="rect">
+            <a:avLst/>
+          </a:prstGeom>
+          <a:noFill/>
+        </p:spPr>
+        <p:txBody>
+          <a:bodyPr wrap="square">
+            <a:spAutoFit/>
+          </a:bodyPr>
+          <a:lstStyle/>
+          <a:p>
+            <a:pPr>
+              <a:spcAft>
+                <a:spcPts val="800"/>
+              </a:spcAft>
+              <a:defRPr sz="2000" b="1">
+                <a:solidFill>
+                  <a:srgbClr val="333333"/>
+                </a:solidFill>
+              </a:defRPr>
+            </a:pPr>
+            <a:r>
+              <a:t>You can combine input() with type conversion in one line!</a:t>
+            </a:r>
+          </a:p>
+          <a:p>
+            <a:pPr>
+              <a:spcAft>
+                <a:spcPts val="800"/>
+              </a:spcAft>
+              <a:defRPr sz="2000" b="1">
+                <a:solidFill>
+                  <a:srgbClr val="333333"/>
+                </a:solidFill>
+              </a:defRPr>
+            </a:pPr>
+            <a:r>
+              <a:t>Long Way:</a:t>
+            </a:r>
+          </a:p>
+          <a:p>
+            <a:pPr>
+              <a:spcAft>
+                <a:spcPts val="800"/>
+              </a:spcAft>
+              <a:defRPr sz="2000" b="1">
+                <a:solidFill>
+                  <a:srgbClr val="333333"/>
+                </a:solidFill>
+              </a:defRPr>
+            </a:pPr>
+            <a:r>
+              <a:t>Short Way:</a:t>
+            </a:r>
+          </a:p>
+          <a:p>
+            <a:pPr>
+              <a:spcAft>
+                <a:spcPts val="800"/>
+              </a:spcAft>
+              <a:defRPr sz="2000" b="1">
+                <a:solidFill>
+                  <a:srgbClr val="333333"/>
+                </a:solidFill>
+              </a:defRPr>
+            </a:pPr>
+            <a:r>
               <a:t>More Examples:</a:t>
-            </a:r>
-          </a:p>
-          <a:p>
-            <a:pPr>
-              <a:spcBef>
-                <a:spcPts val="1200"/>
-              </a:spcBef>
-              <a:defRPr sz="2000">
-                <a:solidFill>
-                  <a:srgbClr val="1F2937"/>
-                </a:solidFill>
-                <a:latin typeface="Courier New"/>
-              </a:defRPr>
-            </a:pPr>
-            <a:r>
-              <a:t>price = float(input("Enter price: "))</a:t>
-            </a:r>
-          </a:p>
-          <a:p>
-            <a:pPr>
-              <a:spcBef>
-                <a:spcPts val="800"/>
-              </a:spcBef>
-              <a:defRPr sz="2000">
-                <a:solidFill>
-                  <a:srgbClr val="1F2937"/>
-                </a:solidFill>
-                <a:latin typeface="Courier New"/>
-              </a:defRPr>
-            </a:pPr>
-            <a:r>
-              <a:t>quantity = int(input("Enter quantity: "))</a:t>
-            </a:r>
-          </a:p>
-          <a:p>
-            <a:pPr>
-              <a:spcBef>
-                <a:spcPts val="800"/>
-              </a:spcBef>
-              <a:defRPr sz="2000">
-                <a:solidFill>
-                  <a:srgbClr val="1F2937"/>
-                </a:solidFill>
-                <a:latin typeface="Courier New"/>
-              </a:defRPr>
-            </a:pPr>
-            <a:r>
-              <a:t>total = price * quantity</a:t>
-            </a:r>
-          </a:p>
-          <a:p>
-            <a:pPr>
-              <a:spcBef>
-                <a:spcPts val="800"/>
-              </a:spcBef>
-              <a:defRPr sz="2000">
-                <a:solidFill>
-                  <a:srgbClr val="1F2937"/>
-                </a:solidFill>
-                <a:latin typeface="Courier New"/>
-              </a:defRPr>
-            </a:pPr>
-            <a:r>
-              <a:t>print("Total:", total)</a:t>
             </a:r>
           </a:p>
         </p:txBody>
@@ -5259,14 +4557,6 @@
 <file path=ppt/slides/slide6.xml><?xml version="1.0" encoding="utf-8"?>
 <p:sld xmlns:a="http://schemas.openxmlformats.org/drawingml/2006/main" xmlns:p="http://schemas.openxmlformats.org/presentationml/2006/main" xmlns:r="http://schemas.openxmlformats.org/officeDocument/2006/relationships">
   <p:cSld>
-    <p:bg>
-      <p:bgPr>
-        <a:solidFill>
-          <a:srgbClr val="FFFFFF"/>
-        </a:solidFill>
-        <a:effectLst/>
-      </p:bgPr>
-    </p:bg>
     <p:spTree>
       <p:nvGrpSpPr>
         <p:cNvPr id="1" name=""/>
@@ -5276,55 +4566,20 @@
       <p:grpSpPr/>
       <p:sp>
         <p:nvSpPr>
-          <p:cNvPr id="2" name="TextBox 1"/>
-          <p:cNvSpPr txBox="1"/>
-          <p:nvPr/>
-        </p:nvSpPr>
-        <p:spPr>
-          <a:xfrm>
-            <a:off x="457200" y="274320"/>
-            <a:ext cx="8229600" cy="731520"/>
-          </a:xfrm>
-          <a:prstGeom prst="rect">
-            <a:avLst/>
-          </a:prstGeom>
-          <a:noFill/>
-        </p:spPr>
-        <p:txBody>
-          <a:bodyPr wrap="none">
-            <a:spAutoFit/>
-          </a:bodyPr>
-          <a:lstStyle/>
-          <a:p>
-            <a:pPr>
-              <a:defRPr sz="4400" b="1">
-                <a:solidFill>
-                  <a:srgbClr val="1F2937"/>
-                </a:solidFill>
-              </a:defRPr>
-            </a:pPr>
-            <a:r>
-              <a:t>String Operations ✂️</a:t>
-            </a:r>
-          </a:p>
-        </p:txBody>
-      </p:sp>
-      <p:sp>
-        <p:nvSpPr>
-          <p:cNvPr id="3" name="Rectangle 2"/>
+          <p:cNvPr id="2" name="Rectangle 1"/>
           <p:cNvSpPr/>
           <p:nvPr/>
         </p:nvSpPr>
         <p:spPr>
           <a:xfrm>
-            <a:off x="457200" y="914400"/>
-            <a:ext cx="1371600" cy="45720"/>
+            <a:off x="0" y="0"/>
+            <a:ext cx="12191695" cy="6858000"/>
           </a:xfrm>
           <a:prstGeom prst="rect">
             <a:avLst/>
           </a:prstGeom>
           <a:solidFill>
-            <a:srgbClr val="2563EB"/>
+            <a:srgbClr val="FFFFFF"/>
           </a:solidFill>
           <a:ln>
             <a:noFill/>
@@ -5354,20 +4609,20 @@
       </p:sp>
       <p:sp>
         <p:nvSpPr>
-          <p:cNvPr id="4" name="Rectangle 3"/>
+          <p:cNvPr id="3" name="Rectangle 2"/>
           <p:cNvSpPr/>
           <p:nvPr/>
         </p:nvSpPr>
         <p:spPr>
           <a:xfrm>
-            <a:off x="457200" y="1280160"/>
-            <a:ext cx="8229600" cy="1188720"/>
+            <a:off x="0" y="0"/>
+            <a:ext cx="12191695" cy="137160"/>
           </a:xfrm>
           <a:prstGeom prst="rect">
             <a:avLst/>
           </a:prstGeom>
           <a:solidFill>
-            <a:srgbClr val="EFF6FF"/>
+            <a:srgbClr val="0066CC"/>
           </a:solidFill>
           <a:ln>
             <a:noFill/>
@@ -5388,66 +4643,44 @@
           </a:fontRef>
         </p:style>
         <p:txBody>
-          <a:bodyPr rtlCol="0" anchor="ctr" tIns="137160" lIns="228600"/>
-          <a:lstStyle/>
-          <a:p>
-            <a:pPr algn="ctr">
-              <a:defRPr sz="2200" b="1">
-                <a:solidFill>
-                  <a:srgbClr val="2563EB"/>
+          <a:bodyPr rtlCol="0" anchor="ctr"/>
+          <a:lstStyle/>
+          <a:p>
+            <a:pPr algn="ctr"/>
+          </a:p>
+        </p:txBody>
+      </p:sp>
+      <p:sp>
+        <p:nvSpPr>
+          <p:cNvPr id="4" name="TextBox 3"/>
+          <p:cNvSpPr txBox="1"/>
+          <p:nvPr/>
+        </p:nvSpPr>
+        <p:spPr>
+          <a:xfrm>
+            <a:off x="457200" y="365760"/>
+            <a:ext cx="10972800" cy="731520"/>
+          </a:xfrm>
+          <a:prstGeom prst="rect">
+            <a:avLst/>
+          </a:prstGeom>
+          <a:noFill/>
+        </p:spPr>
+        <p:txBody>
+          <a:bodyPr wrap="none">
+            <a:spAutoFit/>
+          </a:bodyPr>
+          <a:lstStyle/>
+          <a:p>
+            <a:pPr>
+              <a:defRPr sz="4000" b="1">
+                <a:solidFill>
+                  <a:srgbClr val="003366"/>
                 </a:solidFill>
               </a:defRPr>
             </a:pPr>
             <a:r>
-              <a:t>Concatenation (Joining)</a:t>
-            </a:r>
-          </a:p>
-          <a:p>
-            <a:pPr>
-              <a:spcBef>
-                <a:spcPts val="800"/>
-              </a:spcBef>
-              <a:defRPr sz="1800">
-                <a:solidFill>
-                  <a:srgbClr val="1F2937"/>
-                </a:solidFill>
-                <a:latin typeface="Courier New"/>
-              </a:defRPr>
-            </a:pPr>
-            <a:r>
-              <a:t>first = "Hello"</a:t>
-            </a:r>
-          </a:p>
-          <a:p>
-            <a:pPr>
-              <a:spcBef>
-                <a:spcPts val="300"/>
-              </a:spcBef>
-              <a:defRPr sz="1800">
-                <a:solidFill>
-                  <a:srgbClr val="1F2937"/>
-                </a:solidFill>
-                <a:latin typeface="Courier New"/>
-              </a:defRPr>
-            </a:pPr>
-            <a:r>
-              <a:t>second = "World"</a:t>
-            </a:r>
-          </a:p>
-          <a:p>
-            <a:pPr>
-              <a:spcBef>
-                <a:spcPts val="300"/>
-              </a:spcBef>
-              <a:defRPr sz="1800">
-                <a:solidFill>
-                  <a:srgbClr val="1F2937"/>
-                </a:solidFill>
-                <a:latin typeface="Courier New"/>
-              </a:defRPr>
-            </a:pPr>
-            <a:r>
-              <a:t>result = first + " " + second  → "Hello World"</a:t>
+              <a:t>String Operations ✂️</a:t>
             </a:r>
           </a:p>
         </p:txBody>
@@ -5460,14 +4693,14 @@
         </p:nvSpPr>
         <p:spPr>
           <a:xfrm>
-            <a:off x="457200" y="2651760"/>
-            <a:ext cx="8229600" cy="2377440"/>
+            <a:off x="457200" y="1005840"/>
+            <a:ext cx="1828800" cy="45720"/>
           </a:xfrm>
           <a:prstGeom prst="rect">
             <a:avLst/>
           </a:prstGeom>
           <a:solidFill>
-            <a:srgbClr val="EFF6FF"/>
+            <a:srgbClr val="0066CC"/>
           </a:solidFill>
           <a:ln>
             <a:noFill/>
@@ -5488,150 +4721,77 @@
           </a:fontRef>
         </p:style>
         <p:txBody>
-          <a:bodyPr rtlCol="0" anchor="ctr" tIns="137160" lIns="228600"/>
-          <a:lstStyle/>
-          <a:p>
-            <a:pPr algn="ctr">
-              <a:defRPr sz="2200" b="1">
-                <a:solidFill>
-                  <a:srgbClr val="2563EB"/>
-                </a:solidFill>
-              </a:defRPr>
-            </a:pPr>
-            <a:r>
-              <a:t>Useful String Methods</a:t>
-            </a:r>
-          </a:p>
-          <a:p>
-            <a:pPr>
-              <a:spcBef>
-                <a:spcPts val="1200"/>
-              </a:spcBef>
-              <a:defRPr sz="1600">
-                <a:solidFill>
-                  <a:srgbClr val="1F2937"/>
-                </a:solidFill>
-                <a:latin typeface="Courier New"/>
-              </a:defRPr>
-            </a:pPr>
-            <a:r>
-              <a:t>.upper() → UPPERCASE     "hello".upper() → "HELLO"</a:t>
-            </a:r>
-          </a:p>
-          <a:p>
-            <a:pPr>
-              <a:spcBef>
-                <a:spcPts val="800"/>
-              </a:spcBef>
-              <a:defRPr sz="1600">
-                <a:solidFill>
-                  <a:srgbClr val="1F2937"/>
-                </a:solidFill>
-                <a:latin typeface="Courier New"/>
-              </a:defRPr>
-            </a:pPr>
-            <a:r>
-              <a:t>.lower() → lowercase     "HELLO".lower() → "hello"</a:t>
-            </a:r>
-          </a:p>
-          <a:p>
-            <a:pPr>
-              <a:spcBef>
-                <a:spcPts val="800"/>
-              </a:spcBef>
-              <a:defRPr sz="1600">
-                <a:solidFill>
-                  <a:srgbClr val="1F2937"/>
-                </a:solidFill>
-                <a:latin typeface="Courier New"/>
-              </a:defRPr>
-            </a:pPr>
-            <a:r>
-              <a:t>.strip() → remove spaces     " hi ".strip() → "hi"</a:t>
-            </a:r>
-          </a:p>
-          <a:p>
-            <a:pPr>
-              <a:spcBef>
-                <a:spcPts val="800"/>
-              </a:spcBef>
-              <a:defRPr sz="1600">
-                <a:solidFill>
-                  <a:srgbClr val="1F2937"/>
-                </a:solidFill>
-                <a:latin typeface="Courier New"/>
-              </a:defRPr>
-            </a:pPr>
-            <a:r>
-              <a:t>.replace() → swap text     "cat".replace("c", "b") → "bat"</a:t>
-            </a:r>
-          </a:p>
-        </p:txBody>
-      </p:sp>
-      <p:sp>
-        <p:nvSpPr>
-          <p:cNvPr id="6" name="Rectangle 5"/>
-          <p:cNvSpPr/>
+          <a:bodyPr rtlCol="0" anchor="ctr"/>
+          <a:lstStyle/>
+          <a:p>
+            <a:pPr algn="ctr"/>
+          </a:p>
+        </p:txBody>
+      </p:sp>
+      <p:sp>
+        <p:nvSpPr>
+          <p:cNvPr id="6" name="TextBox 5"/>
+          <p:cNvSpPr txBox="1"/>
           <p:nvPr/>
         </p:nvSpPr>
         <p:spPr>
           <a:xfrm>
-            <a:off x="457200" y="5212080"/>
-            <a:ext cx="8229600" cy="731520"/>
+            <a:off x="640080" y="1371600"/>
+            <a:ext cx="10789920" cy="4572000"/>
           </a:xfrm>
           <a:prstGeom prst="rect">
             <a:avLst/>
           </a:prstGeom>
-          <a:solidFill>
-            <a:srgbClr val="EFF6FF"/>
-          </a:solidFill>
-          <a:ln>
-            <a:noFill/>
-          </a:ln>
-        </p:spPr>
-        <p:style>
-          <a:lnRef idx="1">
-            <a:schemeClr val="accent1"/>
-          </a:lnRef>
-          <a:fillRef idx="3">
-            <a:schemeClr val="accent1"/>
-          </a:fillRef>
-          <a:effectRef idx="2">
-            <a:schemeClr val="accent1"/>
-          </a:effectRef>
-          <a:fontRef idx="minor">
-            <a:schemeClr val="lt1"/>
-          </a:fontRef>
-        </p:style>
-        <p:txBody>
-          <a:bodyPr rtlCol="0" anchor="ctr" tIns="137160" lIns="228600"/>
-          <a:lstStyle/>
-          <a:p>
-            <a:pPr algn="ctr">
-              <a:defRPr sz="2200" b="1">
-                <a:solidFill>
-                  <a:srgbClr val="2563EB"/>
+          <a:noFill/>
+        </p:spPr>
+        <p:txBody>
+          <a:bodyPr wrap="square">
+            <a:spAutoFit/>
+          </a:bodyPr>
+          <a:lstStyle/>
+          <a:p>
+            <a:pPr>
+              <a:spcAft>
+                <a:spcPts val="800"/>
+              </a:spcAft>
+              <a:defRPr sz="2000" b="1">
+                <a:solidFill>
+                  <a:srgbClr val="333333"/>
                 </a:solidFill>
               </a:defRPr>
             </a:pPr>
             <a:r>
+              <a:t>Concatenation (Joining)</a:t>
+            </a:r>
+          </a:p>
+          <a:p>
+            <a:pPr>
+              <a:spcAft>
+                <a:spcPts val="800"/>
+              </a:spcAft>
+              <a:defRPr sz="2000" b="1">
+                <a:solidFill>
+                  <a:srgbClr val="333333"/>
+                </a:solidFill>
+              </a:defRPr>
+            </a:pPr>
+            <a:r>
+              <a:t>Useful String Methods</a:t>
+            </a:r>
+          </a:p>
+          <a:p>
+            <a:pPr>
+              <a:spcAft>
+                <a:spcPts val="800"/>
+              </a:spcAft>
+              <a:defRPr sz="2000" b="1">
+                <a:solidFill>
+                  <a:srgbClr val="333333"/>
+                </a:solidFill>
+              </a:defRPr>
+            </a:pPr>
+            <a:r>
               <a:t>String Length</a:t>
-            </a:r>
-          </a:p>
-          <a:p>
-            <a:pPr>
-              <a:spcBef>
-                <a:spcPts val="500"/>
-              </a:spcBef>
-              <a:defRPr sz="1800">
-                <a:solidFill>
-                  <a:srgbClr val="1F2937"/>
-                </a:solidFill>
-                <a:latin typeface="Courier New"/>
-              </a:defRPr>
-            </a:pPr>
-            <a:r>
-              <a:t>len("Python") → 6</a:t>
             </a:r>
           </a:p>
         </p:txBody>
@@ -5647,14 +4807,6 @@
 <file path=ppt/slides/slide7.xml><?xml version="1.0" encoding="utf-8"?>
 <p:sld xmlns:a="http://schemas.openxmlformats.org/drawingml/2006/main" xmlns:p="http://schemas.openxmlformats.org/presentationml/2006/main" xmlns:r="http://schemas.openxmlformats.org/officeDocument/2006/relationships">
   <p:cSld>
-    <p:bg>
-      <p:bgPr>
-        <a:solidFill>
-          <a:srgbClr val="EFF6FF"/>
-        </a:solidFill>
-        <a:effectLst/>
-      </p:bgPr>
-    </p:bg>
     <p:spTree>
       <p:nvGrpSpPr>
         <p:cNvPr id="1" name=""/>
@@ -5664,127 +4816,14 @@
       <p:grpSpPr/>
       <p:sp>
         <p:nvSpPr>
-          <p:cNvPr id="2" name="TextBox 1"/>
-          <p:cNvSpPr txBox="1"/>
-          <p:nvPr/>
-        </p:nvSpPr>
-        <p:spPr>
-          <a:xfrm>
-            <a:off x="457200" y="274320"/>
-            <a:ext cx="8229600" cy="731520"/>
-          </a:xfrm>
-          <a:prstGeom prst="rect">
-            <a:avLst/>
-          </a:prstGeom>
-          <a:noFill/>
-        </p:spPr>
-        <p:txBody>
-          <a:bodyPr wrap="none">
-            <a:spAutoFit/>
-          </a:bodyPr>
-          <a:lstStyle/>
-          <a:p>
-            <a:pPr>
-              <a:defRPr sz="4400" b="1">
-                <a:solidFill>
-                  <a:srgbClr val="1F2937"/>
-                </a:solidFill>
-              </a:defRPr>
-            </a:pPr>
-            <a:r>
-              <a:t>Comments in Code 📝</a:t>
-            </a:r>
-          </a:p>
-        </p:txBody>
-      </p:sp>
-      <p:sp>
-        <p:nvSpPr>
-          <p:cNvPr id="3" name="Rectangle 2"/>
+          <p:cNvPr id="2" name="Rectangle 1"/>
           <p:cNvSpPr/>
           <p:nvPr/>
         </p:nvSpPr>
         <p:spPr>
           <a:xfrm>
-            <a:off x="457200" y="914400"/>
-            <a:ext cx="1371600" cy="45720"/>
-          </a:xfrm>
-          <a:prstGeom prst="rect">
-            <a:avLst/>
-          </a:prstGeom>
-          <a:solidFill>
-            <a:srgbClr val="2563EB"/>
-          </a:solidFill>
-          <a:ln>
-            <a:noFill/>
-          </a:ln>
-        </p:spPr>
-        <p:style>
-          <a:lnRef idx="1">
-            <a:schemeClr val="accent1"/>
-          </a:lnRef>
-          <a:fillRef idx="3">
-            <a:schemeClr val="accent1"/>
-          </a:fillRef>
-          <a:effectRef idx="2">
-            <a:schemeClr val="accent1"/>
-          </a:effectRef>
-          <a:fontRef idx="minor">
-            <a:schemeClr val="lt1"/>
-          </a:fontRef>
-        </p:style>
-        <p:txBody>
-          <a:bodyPr rtlCol="0" anchor="ctr"/>
-          <a:lstStyle/>
-          <a:p>
-            <a:pPr algn="ctr"/>
-          </a:p>
-        </p:txBody>
-      </p:sp>
-      <p:sp>
-        <p:nvSpPr>
-          <p:cNvPr id="4" name="TextBox 3"/>
-          <p:cNvSpPr txBox="1"/>
-          <p:nvPr/>
-        </p:nvSpPr>
-        <p:spPr>
-          <a:xfrm>
-            <a:off x="457200" y="1280160"/>
-            <a:ext cx="8229600" cy="457200"/>
-          </a:xfrm>
-          <a:prstGeom prst="rect">
-            <a:avLst/>
-          </a:prstGeom>
-          <a:noFill/>
-        </p:spPr>
-        <p:txBody>
-          <a:bodyPr wrap="none">
-            <a:spAutoFit/>
-          </a:bodyPr>
-          <a:lstStyle/>
-          <a:p>
-            <a:pPr>
-              <a:defRPr sz="2200">
-                <a:solidFill>
-                  <a:srgbClr val="4B5563"/>
-                </a:solidFill>
-              </a:defRPr>
-            </a:pPr>
-            <a:r>
-              <a:t>Comments are notes for humans - Python ignores them!</a:t>
-            </a:r>
-          </a:p>
-        </p:txBody>
-      </p:sp>
-      <p:sp>
-        <p:nvSpPr>
-          <p:cNvPr id="5" name="Rectangle 4"/>
-          <p:cNvSpPr/>
-          <p:nvPr/>
-        </p:nvSpPr>
-        <p:spPr>
-          <a:xfrm>
-            <a:off x="457200" y="2011680"/>
-            <a:ext cx="8229600" cy="1188720"/>
+            <a:off x="0" y="0"/>
+            <a:ext cx="12191695" cy="6858000"/>
           </a:xfrm>
           <a:prstGeom prst="rect">
             <a:avLst/>
@@ -5792,10 +4831,8 @@
           <a:solidFill>
             <a:srgbClr val="FFFFFF"/>
           </a:solidFill>
-          <a:ln w="25400">
-            <a:solidFill>
-              <a:srgbClr val="3B82F6"/>
-            </a:solidFill>
+          <a:ln>
+            <a:noFill/>
           </a:ln>
         </p:spPr>
         <p:style>
@@ -5813,75 +4850,32 @@
           </a:fontRef>
         </p:style>
         <p:txBody>
-          <a:bodyPr rtlCol="0" anchor="ctr" tIns="182880" lIns="274320"/>
-          <a:lstStyle/>
-          <a:p>
-            <a:pPr algn="ctr">
-              <a:defRPr sz="2400" b="1">
-                <a:solidFill>
-                  <a:srgbClr val="1F2937"/>
-                </a:solidFill>
-              </a:defRPr>
-            </a:pPr>
-            <a:r>
-              <a:t>Single-Line Comments:</a:t>
-            </a:r>
-          </a:p>
-          <a:p>
-            <a:pPr>
-              <a:spcBef>
-                <a:spcPts val="1000"/>
-              </a:spcBef>
-              <a:defRPr sz="2000">
-                <a:solidFill>
-                  <a:srgbClr val="9CA3AF"/>
-                </a:solidFill>
-                <a:latin typeface="Courier New"/>
-              </a:defRPr>
-            </a:pPr>
-            <a:r>
-              <a:t># This is a comment</a:t>
-            </a:r>
-          </a:p>
-          <a:p>
-            <a:pPr>
-              <a:spcBef>
-                <a:spcPts val="500"/>
-              </a:spcBef>
-              <a:defRPr sz="2000">
-                <a:solidFill>
-                  <a:srgbClr val="1F2937"/>
-                </a:solidFill>
-                <a:latin typeface="Courier New"/>
-              </a:defRPr>
-            </a:pPr>
-            <a:r>
-              <a:t>price = 99.99  # Price in dollars</a:t>
-            </a:r>
-          </a:p>
-        </p:txBody>
-      </p:sp>
-      <p:sp>
-        <p:nvSpPr>
-          <p:cNvPr id="6" name="Rectangle 5"/>
+          <a:bodyPr rtlCol="0" anchor="ctr"/>
+          <a:lstStyle/>
+          <a:p>
+            <a:pPr algn="ctr"/>
+          </a:p>
+        </p:txBody>
+      </p:sp>
+      <p:sp>
+        <p:nvSpPr>
+          <p:cNvPr id="3" name="Rectangle 2"/>
           <p:cNvSpPr/>
           <p:nvPr/>
         </p:nvSpPr>
         <p:spPr>
           <a:xfrm>
-            <a:off x="457200" y="3383280"/>
-            <a:ext cx="8229600" cy="1463040"/>
+            <a:off x="0" y="0"/>
+            <a:ext cx="12191695" cy="137160"/>
           </a:xfrm>
           <a:prstGeom prst="rect">
             <a:avLst/>
           </a:prstGeom>
           <a:solidFill>
-            <a:srgbClr val="FFFFFF"/>
+            <a:srgbClr val="0066CC"/>
           </a:solidFill>
-          <a:ln w="25400">
-            <a:solidFill>
-              <a:srgbClr val="3B82F6"/>
-            </a:solidFill>
+          <a:ln>
+            <a:noFill/>
           </a:ln>
         </p:spPr>
         <p:style>
@@ -5899,102 +4893,64 @@
           </a:fontRef>
         </p:style>
         <p:txBody>
-          <a:bodyPr rtlCol="0" anchor="ctr" tIns="182880" lIns="274320"/>
-          <a:lstStyle/>
-          <a:p>
-            <a:pPr algn="ctr">
-              <a:defRPr sz="2400" b="1">
-                <a:solidFill>
-                  <a:srgbClr val="1F2937"/>
+          <a:bodyPr rtlCol="0" anchor="ctr"/>
+          <a:lstStyle/>
+          <a:p>
+            <a:pPr algn="ctr"/>
+          </a:p>
+        </p:txBody>
+      </p:sp>
+      <p:sp>
+        <p:nvSpPr>
+          <p:cNvPr id="4" name="TextBox 3"/>
+          <p:cNvSpPr txBox="1"/>
+          <p:nvPr/>
+        </p:nvSpPr>
+        <p:spPr>
+          <a:xfrm>
+            <a:off x="457200" y="365760"/>
+            <a:ext cx="10972800" cy="731520"/>
+          </a:xfrm>
+          <a:prstGeom prst="rect">
+            <a:avLst/>
+          </a:prstGeom>
+          <a:noFill/>
+        </p:spPr>
+        <p:txBody>
+          <a:bodyPr wrap="none">
+            <a:spAutoFit/>
+          </a:bodyPr>
+          <a:lstStyle/>
+          <a:p>
+            <a:pPr>
+              <a:defRPr sz="4000" b="1">
+                <a:solidFill>
+                  <a:srgbClr val="003366"/>
                 </a:solidFill>
               </a:defRPr>
             </a:pPr>
             <a:r>
-              <a:t>Multi-Line Comments:</a:t>
-            </a:r>
-          </a:p>
-          <a:p>
-            <a:pPr>
-              <a:spcBef>
-                <a:spcPts val="1000"/>
-              </a:spcBef>
-              <a:defRPr sz="2000">
-                <a:solidFill>
-                  <a:srgbClr val="9CA3AF"/>
-                </a:solidFill>
-                <a:latin typeface="Courier New"/>
-              </a:defRPr>
-            </a:pPr>
-            <a:r>
-              <a:t>"""</a:t>
-            </a:r>
-          </a:p>
-          <a:p>
-            <a:pPr>
-              <a:spcBef>
-                <a:spcPts val="300"/>
-              </a:spcBef>
-              <a:defRPr sz="2000">
-                <a:solidFill>
-                  <a:srgbClr val="9CA3AF"/>
-                </a:solidFill>
-                <a:latin typeface="Courier New"/>
-              </a:defRPr>
-            </a:pPr>
-            <a:r>
-              <a:t>This is a longer comment</a:t>
-            </a:r>
-          </a:p>
-          <a:p>
-            <a:pPr>
-              <a:spcBef>
-                <a:spcPts val="300"/>
-              </a:spcBef>
-              <a:defRPr sz="2000">
-                <a:solidFill>
-                  <a:srgbClr val="9CA3AF"/>
-                </a:solidFill>
-                <a:latin typeface="Courier New"/>
-              </a:defRPr>
-            </a:pPr>
-            <a:r>
-              <a:t>that spans multiple lines</a:t>
-            </a:r>
-          </a:p>
-          <a:p>
-            <a:pPr>
-              <a:spcBef>
-                <a:spcPts val="300"/>
-              </a:spcBef>
-              <a:defRPr sz="2000">
-                <a:solidFill>
-                  <a:srgbClr val="9CA3AF"/>
-                </a:solidFill>
-                <a:latin typeface="Courier New"/>
-              </a:defRPr>
-            </a:pPr>
-            <a:r>
-              <a:t>"""</a:t>
-            </a:r>
-          </a:p>
-        </p:txBody>
-      </p:sp>
-      <p:sp>
-        <p:nvSpPr>
-          <p:cNvPr id="7" name="Rectangle 6"/>
+              <a:t>Comments in Code 📝</a:t>
+            </a:r>
+          </a:p>
+        </p:txBody>
+      </p:sp>
+      <p:sp>
+        <p:nvSpPr>
+          <p:cNvPr id="5" name="Rectangle 4"/>
           <p:cNvSpPr/>
           <p:nvPr/>
         </p:nvSpPr>
         <p:spPr>
           <a:xfrm>
-            <a:off x="457200" y="5120640"/>
-            <a:ext cx="3931920" cy="822960"/>
+            <a:off x="457200" y="1005840"/>
+            <a:ext cx="1828800" cy="45720"/>
           </a:xfrm>
           <a:prstGeom prst="rect">
             <a:avLst/>
           </a:prstGeom>
           <a:solidFill>
-            <a:srgbClr val="F0FDF4"/>
+            <a:srgbClr val="0066CC"/>
           </a:solidFill>
           <a:ln>
             <a:noFill/>
@@ -6015,95 +4971,102 @@
           </a:fontRef>
         </p:style>
         <p:txBody>
-          <a:bodyPr rtlCol="0" anchor="ctr" tIns="137160" lIns="182880"/>
-          <a:lstStyle/>
-          <a:p>
-            <a:pPr algn="ctr">
-              <a:defRPr sz="1800" b="1">
-                <a:solidFill>
-                  <a:srgbClr val="22C55E"/>
-                </a:solidFill>
-              </a:defRPr>
-            </a:pPr>
-            <a:r>
-              <a:t>✓ Good Comments:</a:t>
-            </a:r>
-          </a:p>
-          <a:p>
-            <a:pPr>
-              <a:spcBef>
-                <a:spcPts val="300"/>
-              </a:spcBef>
-              <a:defRPr sz="1600">
-                <a:solidFill>
-                  <a:srgbClr val="4B5563"/>
-                </a:solidFill>
-              </a:defRPr>
-            </a:pPr>
-            <a:r>
-              <a:t>Explain WHY, not WHAT</a:t>
-            </a:r>
-          </a:p>
-        </p:txBody>
-      </p:sp>
-      <p:sp>
-        <p:nvSpPr>
-          <p:cNvPr id="8" name="Rectangle 7"/>
-          <p:cNvSpPr/>
+          <a:bodyPr rtlCol="0" anchor="ctr"/>
+          <a:lstStyle/>
+          <a:p>
+            <a:pPr algn="ctr"/>
+          </a:p>
+        </p:txBody>
+      </p:sp>
+      <p:sp>
+        <p:nvSpPr>
+          <p:cNvPr id="6" name="TextBox 5"/>
+          <p:cNvSpPr txBox="1"/>
           <p:nvPr/>
         </p:nvSpPr>
         <p:spPr>
           <a:xfrm>
-            <a:off x="4754880" y="5120640"/>
-            <a:ext cx="3931920" cy="822960"/>
+            <a:off x="640080" y="1371600"/>
+            <a:ext cx="10789920" cy="4572000"/>
           </a:xfrm>
           <a:prstGeom prst="rect">
             <a:avLst/>
           </a:prstGeom>
-          <a:solidFill>
-            <a:srgbClr val="EFF6FF"/>
-          </a:solidFill>
-          <a:ln>
-            <a:noFill/>
-          </a:ln>
-        </p:spPr>
-        <p:style>
-          <a:lnRef idx="1">
-            <a:schemeClr val="accent1"/>
-          </a:lnRef>
-          <a:fillRef idx="3">
-            <a:schemeClr val="accent1"/>
-          </a:fillRef>
-          <a:effectRef idx="2">
-            <a:schemeClr val="accent1"/>
-          </a:effectRef>
-          <a:fontRef idx="minor">
-            <a:schemeClr val="lt1"/>
-          </a:fontRef>
-        </p:style>
-        <p:txBody>
-          <a:bodyPr rtlCol="0" anchor="ctr" tIns="137160" lIns="182880"/>
-          <a:lstStyle/>
-          <a:p>
-            <a:pPr algn="ctr">
-              <a:defRPr sz="1800" b="1">
-                <a:solidFill>
-                  <a:srgbClr val="2563EB"/>
+          <a:noFill/>
+        </p:spPr>
+        <p:txBody>
+          <a:bodyPr wrap="square">
+            <a:spAutoFit/>
+          </a:bodyPr>
+          <a:lstStyle/>
+          <a:p>
+            <a:pPr>
+              <a:spcAft>
+                <a:spcPts val="800"/>
+              </a:spcAft>
+              <a:defRPr sz="2000" b="1">
+                <a:solidFill>
+                  <a:srgbClr val="333333"/>
                 </a:solidFill>
               </a:defRPr>
             </a:pPr>
             <a:r>
-              <a:t>Use Comments To:</a:t>
+              <a:t>Comments are notes for humans - Python ignores them!</a:t>
             </a:r>
           </a:p>
           <a:p>
             <a:pPr>
-              <a:spcBef>
-                <a:spcPts val="300"/>
-              </a:spcBef>
-              <a:defRPr sz="1600">
-                <a:solidFill>
-                  <a:srgbClr val="4B5563"/>
+              <a:spcAft>
+                <a:spcPts val="800"/>
+              </a:spcAft>
+              <a:defRPr sz="2000" b="1">
+                <a:solidFill>
+                  <a:srgbClr val="333333"/>
+                </a:solidFill>
+              </a:defRPr>
+            </a:pPr>
+            <a:r>
+              <a:t>Single-Line Comments:</a:t>
+            </a:r>
+          </a:p>
+          <a:p>
+            <a:pPr>
+              <a:spcAft>
+                <a:spcPts val="800"/>
+              </a:spcAft>
+              <a:defRPr sz="2000" b="1">
+                <a:solidFill>
+                  <a:srgbClr val="333333"/>
+                </a:solidFill>
+              </a:defRPr>
+            </a:pPr>
+            <a:r>
+              <a:t>Multi-Line Comments:</a:t>
+            </a:r>
+          </a:p>
+          <a:p>
+            <a:pPr>
+              <a:spcAft>
+                <a:spcPts val="800"/>
+              </a:spcAft>
+              <a:defRPr sz="2000" b="1">
+                <a:solidFill>
+                  <a:srgbClr val="333333"/>
+                </a:solidFill>
+              </a:defRPr>
+            </a:pPr>
+            <a:r>
+              <a:t>Explain WHY, not WHAT</a:t>
+            </a:r>
+          </a:p>
+          <a:p>
+            <a:pPr>
+              <a:spcAft>
+                <a:spcPts val="800"/>
+              </a:spcAft>
+              <a:defRPr sz="2000" b="1">
+                <a:solidFill>
+                  <a:srgbClr val="333333"/>
                 </a:solidFill>
               </a:defRPr>
             </a:pPr>
@@ -6124,14 +5087,6 @@
 <file path=ppt/slides/slide8.xml><?xml version="1.0" encoding="utf-8"?>
 <p:sld xmlns:a="http://schemas.openxmlformats.org/drawingml/2006/main" xmlns:p="http://schemas.openxmlformats.org/presentationml/2006/main" xmlns:r="http://schemas.openxmlformats.org/officeDocument/2006/relationships">
   <p:cSld>
-    <p:bg>
-      <p:bgPr>
-        <a:solidFill>
-          <a:srgbClr val="FFFFFF"/>
-        </a:solidFill>
-        <a:effectLst/>
-      </p:bgPr>
-    </p:bg>
     <p:spTree>
       <p:nvGrpSpPr>
         <p:cNvPr id="1" name=""/>
@@ -6141,55 +5096,20 @@
       <p:grpSpPr/>
       <p:sp>
         <p:nvSpPr>
-          <p:cNvPr id="2" name="TextBox 1"/>
-          <p:cNvSpPr txBox="1"/>
-          <p:nvPr/>
-        </p:nvSpPr>
-        <p:spPr>
-          <a:xfrm>
-            <a:off x="457200" y="274320"/>
-            <a:ext cx="8229600" cy="731520"/>
-          </a:xfrm>
-          <a:prstGeom prst="rect">
-            <a:avLst/>
-          </a:prstGeom>
-          <a:noFill/>
-        </p:spPr>
-        <p:txBody>
-          <a:bodyPr wrap="none">
-            <a:spAutoFit/>
-          </a:bodyPr>
-          <a:lstStyle/>
-          <a:p>
-            <a:pPr>
-              <a:defRPr sz="4400" b="1">
-                <a:solidFill>
-                  <a:srgbClr val="1F2937"/>
-                </a:solidFill>
-              </a:defRPr>
-            </a:pPr>
-            <a:r>
-              <a:t>Understanding Errors 🐛</a:t>
-            </a:r>
-          </a:p>
-        </p:txBody>
-      </p:sp>
-      <p:sp>
-        <p:nvSpPr>
-          <p:cNvPr id="3" name="Rectangle 2"/>
+          <p:cNvPr id="2" name="Rectangle 1"/>
           <p:cNvSpPr/>
           <p:nvPr/>
         </p:nvSpPr>
         <p:spPr>
           <a:xfrm>
-            <a:off x="457200" y="914400"/>
-            <a:ext cx="1371600" cy="45720"/>
+            <a:off x="0" y="0"/>
+            <a:ext cx="12191695" cy="6858000"/>
           </a:xfrm>
           <a:prstGeom prst="rect">
             <a:avLst/>
           </a:prstGeom>
           <a:solidFill>
-            <a:srgbClr val="2563EB"/>
+            <a:srgbClr val="FFFFFF"/>
           </a:solidFill>
           <a:ln>
             <a:noFill/>
@@ -6219,55 +5139,20 @@
       </p:sp>
       <p:sp>
         <p:nvSpPr>
-          <p:cNvPr id="4" name="TextBox 3"/>
-          <p:cNvSpPr txBox="1"/>
-          <p:nvPr/>
-        </p:nvSpPr>
-        <p:spPr>
-          <a:xfrm>
-            <a:off x="457200" y="1280160"/>
-            <a:ext cx="8229600" cy="457200"/>
-          </a:xfrm>
-          <a:prstGeom prst="rect">
-            <a:avLst/>
-          </a:prstGeom>
-          <a:noFill/>
-        </p:spPr>
-        <p:txBody>
-          <a:bodyPr wrap="none">
-            <a:spAutoFit/>
-          </a:bodyPr>
-          <a:lstStyle/>
-          <a:p>
-            <a:pPr>
-              <a:defRPr sz="2200">
-                <a:solidFill>
-                  <a:srgbClr val="4B5563"/>
-                </a:solidFill>
-              </a:defRPr>
-            </a:pPr>
-            <a:r>
-              <a:t>Errors are normal! They help you learn and fix problems.</a:t>
-            </a:r>
-          </a:p>
-        </p:txBody>
-      </p:sp>
-      <p:sp>
-        <p:nvSpPr>
-          <p:cNvPr id="5" name="Rectangle 4"/>
+          <p:cNvPr id="3" name="Rectangle 2"/>
           <p:cNvSpPr/>
           <p:nvPr/>
         </p:nvSpPr>
         <p:spPr>
           <a:xfrm>
-            <a:off x="457200" y="1920240"/>
-            <a:ext cx="8229600" cy="1005840"/>
+            <a:off x="0" y="0"/>
+            <a:ext cx="12191695" cy="137160"/>
           </a:xfrm>
           <a:prstGeom prst="rect">
             <a:avLst/>
           </a:prstGeom>
           <a:solidFill>
-            <a:srgbClr val="FEF2F2"/>
+            <a:srgbClr val="0066CC"/>
           </a:solidFill>
           <a:ln>
             <a:noFill/>
@@ -6288,69 +5173,64 @@
           </a:fontRef>
         </p:style>
         <p:txBody>
-          <a:bodyPr rtlCol="0" anchor="ctr" tIns="137160" lIns="182880"/>
-          <a:lstStyle/>
-          <a:p>
-            <a:pPr algn="ctr">
-              <a:defRPr sz="2200" b="1">
-                <a:solidFill>
-                  <a:srgbClr val="EF4444"/>
+          <a:bodyPr rtlCol="0" anchor="ctr"/>
+          <a:lstStyle/>
+          <a:p>
+            <a:pPr algn="ctr"/>
+          </a:p>
+        </p:txBody>
+      </p:sp>
+      <p:sp>
+        <p:nvSpPr>
+          <p:cNvPr id="4" name="TextBox 3"/>
+          <p:cNvSpPr txBox="1"/>
+          <p:nvPr/>
+        </p:nvSpPr>
+        <p:spPr>
+          <a:xfrm>
+            <a:off x="457200" y="365760"/>
+            <a:ext cx="10972800" cy="731520"/>
+          </a:xfrm>
+          <a:prstGeom prst="rect">
+            <a:avLst/>
+          </a:prstGeom>
+          <a:noFill/>
+        </p:spPr>
+        <p:txBody>
+          <a:bodyPr wrap="none">
+            <a:spAutoFit/>
+          </a:bodyPr>
+          <a:lstStyle/>
+          <a:p>
+            <a:pPr>
+              <a:defRPr sz="4000" b="1">
+                <a:solidFill>
+                  <a:srgbClr val="003366"/>
                 </a:solidFill>
               </a:defRPr>
             </a:pPr>
             <a:r>
-              <a:t>ValueError</a:t>
-            </a:r>
-          </a:p>
-          <a:p>
-            <a:pPr>
-              <a:spcBef>
-                <a:spcPts val="500"/>
-              </a:spcBef>
-              <a:defRPr sz="1600">
-                <a:solidFill>
-                  <a:srgbClr val="4B5563"/>
-                </a:solidFill>
-              </a:defRPr>
-            </a:pPr>
-            <a:r>
-              <a:t>Trying to convert invalid text to number</a:t>
-            </a:r>
-          </a:p>
-          <a:p>
-            <a:pPr>
-              <a:spcBef>
-                <a:spcPts val="500"/>
-              </a:spcBef>
-              <a:defRPr sz="1600">
-                <a:solidFill>
-                  <a:srgbClr val="1F2937"/>
-                </a:solidFill>
-                <a:latin typeface="Courier New"/>
-              </a:defRPr>
-            </a:pPr>
-            <a:r>
-              <a:t>int("hello") → ValueError</a:t>
-            </a:r>
-          </a:p>
-        </p:txBody>
-      </p:sp>
-      <p:sp>
-        <p:nvSpPr>
-          <p:cNvPr id="6" name="Rectangle 5"/>
+              <a:t>Understanding Errors 🐛</a:t>
+            </a:r>
+          </a:p>
+        </p:txBody>
+      </p:sp>
+      <p:sp>
+        <p:nvSpPr>
+          <p:cNvPr id="5" name="Rectangle 4"/>
           <p:cNvSpPr/>
           <p:nvPr/>
         </p:nvSpPr>
         <p:spPr>
           <a:xfrm>
-            <a:off x="457200" y="1920240"/>
-            <a:ext cx="73152" cy="1005840"/>
+            <a:off x="457200" y="1005840"/>
+            <a:ext cx="1828800" cy="45720"/>
           </a:xfrm>
           <a:prstGeom prst="rect">
             <a:avLst/>
           </a:prstGeom>
           <a:solidFill>
-            <a:srgbClr val="EF4444"/>
+            <a:srgbClr val="0066CC"/>
           </a:solidFill>
           <a:ln>
             <a:noFill/>
@@ -6380,62 +5260,93 @@
       </p:sp>
       <p:sp>
         <p:nvSpPr>
-          <p:cNvPr id="7" name="Rectangle 6"/>
-          <p:cNvSpPr/>
+          <p:cNvPr id="6" name="TextBox 5"/>
+          <p:cNvSpPr txBox="1"/>
           <p:nvPr/>
         </p:nvSpPr>
         <p:spPr>
           <a:xfrm>
-            <a:off x="457200" y="3108960"/>
-            <a:ext cx="8229600" cy="1005840"/>
+            <a:off x="640080" y="1371600"/>
+            <a:ext cx="10789920" cy="4572000"/>
           </a:xfrm>
           <a:prstGeom prst="rect">
             <a:avLst/>
           </a:prstGeom>
-          <a:solidFill>
-            <a:srgbClr val="FEF2F2"/>
-          </a:solidFill>
-          <a:ln>
-            <a:noFill/>
-          </a:ln>
-        </p:spPr>
-        <p:style>
-          <a:lnRef idx="1">
-            <a:schemeClr val="accent1"/>
-          </a:lnRef>
-          <a:fillRef idx="3">
-            <a:schemeClr val="accent1"/>
-          </a:fillRef>
-          <a:effectRef idx="2">
-            <a:schemeClr val="accent1"/>
-          </a:effectRef>
-          <a:fontRef idx="minor">
-            <a:schemeClr val="lt1"/>
-          </a:fontRef>
-        </p:style>
-        <p:txBody>
-          <a:bodyPr rtlCol="0" anchor="ctr" tIns="137160" lIns="182880"/>
-          <a:lstStyle/>
-          <a:p>
-            <a:pPr algn="ctr">
-              <a:defRPr sz="2200" b="1">
-                <a:solidFill>
-                  <a:srgbClr val="EF4444"/>
+          <a:noFill/>
+        </p:spPr>
+        <p:txBody>
+          <a:bodyPr wrap="square">
+            <a:spAutoFit/>
+          </a:bodyPr>
+          <a:lstStyle/>
+          <a:p>
+            <a:pPr>
+              <a:spcAft>
+                <a:spcPts val="800"/>
+              </a:spcAft>
+              <a:defRPr sz="2000" b="1">
+                <a:solidFill>
+                  <a:srgbClr val="333333"/>
                 </a:solidFill>
               </a:defRPr>
             </a:pPr>
             <a:r>
+              <a:t>Errors are normal! They help you learn and fix problems.</a:t>
+            </a:r>
+          </a:p>
+          <a:p>
+            <a:pPr>
+              <a:spcAft>
+                <a:spcPts val="800"/>
+              </a:spcAft>
+              <a:defRPr sz="2000" b="1">
+                <a:solidFill>
+                  <a:srgbClr val="333333"/>
+                </a:solidFill>
+              </a:defRPr>
+            </a:pPr>
+            <a:r>
+              <a:t>ValueError</a:t>
+            </a:r>
+          </a:p>
+          <a:p>
+            <a:pPr>
+              <a:spcAft>
+                <a:spcPts val="800"/>
+              </a:spcAft>
+              <a:defRPr sz="2000" b="1">
+                <a:solidFill>
+                  <a:srgbClr val="333333"/>
+                </a:solidFill>
+              </a:defRPr>
+            </a:pPr>
+            <a:r>
+              <a:t>Trying to convert invalid text to number</a:t>
+            </a:r>
+          </a:p>
+          <a:p>
+            <a:pPr>
+              <a:spcAft>
+                <a:spcPts val="800"/>
+              </a:spcAft>
+              <a:defRPr sz="2000" b="1">
+                <a:solidFill>
+                  <a:srgbClr val="333333"/>
+                </a:solidFill>
+              </a:defRPr>
+            </a:pPr>
+            <a:r>
               <a:t>TypeError</a:t>
             </a:r>
           </a:p>
           <a:p>
             <a:pPr>
-              <a:spcBef>
-                <a:spcPts val="500"/>
-              </a:spcBef>
-              <a:defRPr sz="1600">
-                <a:solidFill>
-                  <a:srgbClr val="4B5563"/>
+              <a:spcAft>
+                <a:spcPts val="800"/>
+              </a:spcAft>
+              <a:defRPr sz="2000" b="1">
+                <a:solidFill>
+                  <a:srgbClr val="333333"/>
                 </a:solidFill>
               </a:defRPr>
             </a:pPr>
@@ -6445,246 +5356,47 @@
           </a:p>
           <a:p>
             <a:pPr>
-              <a:spcBef>
-                <a:spcPts val="500"/>
-              </a:spcBef>
-              <a:defRPr sz="1600">
-                <a:solidFill>
-                  <a:srgbClr val="1F2937"/>
-                </a:solidFill>
-                <a:latin typeface="Courier New"/>
+              <a:spcAft>
+                <a:spcPts val="800"/>
+              </a:spcAft>
+              <a:defRPr sz="2000" b="1">
+                <a:solidFill>
+                  <a:srgbClr val="333333"/>
+                </a:solidFill>
               </a:defRPr>
             </a:pPr>
             <a:r>
-              <a:t>"5" + 5 → TypeError</a:t>
-            </a:r>
-          </a:p>
-        </p:txBody>
-      </p:sp>
-      <p:sp>
-        <p:nvSpPr>
-          <p:cNvPr id="8" name="Rectangle 7"/>
-          <p:cNvSpPr/>
-          <p:nvPr/>
-        </p:nvSpPr>
-        <p:spPr>
-          <a:xfrm>
-            <a:off x="457200" y="3108960"/>
-            <a:ext cx="73152" cy="1005840"/>
-          </a:xfrm>
-          <a:prstGeom prst="rect">
-            <a:avLst/>
-          </a:prstGeom>
-          <a:solidFill>
-            <a:srgbClr val="EF4444"/>
-          </a:solidFill>
-          <a:ln>
-            <a:noFill/>
-          </a:ln>
-        </p:spPr>
-        <p:style>
-          <a:lnRef idx="1">
-            <a:schemeClr val="accent1"/>
-          </a:lnRef>
-          <a:fillRef idx="3">
-            <a:schemeClr val="accent1"/>
-          </a:fillRef>
-          <a:effectRef idx="2">
-            <a:schemeClr val="accent1"/>
-          </a:effectRef>
-          <a:fontRef idx="minor">
-            <a:schemeClr val="lt1"/>
-          </a:fontRef>
-        </p:style>
-        <p:txBody>
-          <a:bodyPr rtlCol="0" anchor="ctr"/>
-          <a:lstStyle/>
-          <a:p>
-            <a:pPr algn="ctr"/>
-          </a:p>
-        </p:txBody>
-      </p:sp>
-      <p:sp>
-        <p:nvSpPr>
-          <p:cNvPr id="9" name="Rectangle 8"/>
-          <p:cNvSpPr/>
-          <p:nvPr/>
-        </p:nvSpPr>
-        <p:spPr>
-          <a:xfrm>
-            <a:off x="457200" y="4297680"/>
-            <a:ext cx="8229600" cy="1005840"/>
-          </a:xfrm>
-          <a:prstGeom prst="rect">
-            <a:avLst/>
-          </a:prstGeom>
-          <a:solidFill>
-            <a:srgbClr val="FEF2F2"/>
-          </a:solidFill>
-          <a:ln>
-            <a:noFill/>
-          </a:ln>
-        </p:spPr>
-        <p:style>
-          <a:lnRef idx="1">
-            <a:schemeClr val="accent1"/>
-          </a:lnRef>
-          <a:fillRef idx="3">
-            <a:schemeClr val="accent1"/>
-          </a:fillRef>
-          <a:effectRef idx="2">
-            <a:schemeClr val="accent1"/>
-          </a:effectRef>
-          <a:fontRef idx="minor">
-            <a:schemeClr val="lt1"/>
-          </a:fontRef>
-        </p:style>
-        <p:txBody>
-          <a:bodyPr rtlCol="0" anchor="ctr" tIns="137160" lIns="182880"/>
-          <a:lstStyle/>
-          <a:p>
-            <a:pPr algn="ctr">
-              <a:defRPr sz="2200" b="1">
-                <a:solidFill>
-                  <a:srgbClr val="EF4444"/>
+              <a:t>SyntaxError</a:t>
+            </a:r>
+          </a:p>
+          <a:p>
+            <a:pPr>
+              <a:spcAft>
+                <a:spcPts val="800"/>
+              </a:spcAft>
+              <a:defRPr sz="2000" b="1">
+                <a:solidFill>
+                  <a:srgbClr val="333333"/>
                 </a:solidFill>
               </a:defRPr>
             </a:pPr>
             <a:r>
-              <a:t>SyntaxError</a:t>
+              <a:t>Invalid Python syntax</a:t>
             </a:r>
           </a:p>
           <a:p>
             <a:pPr>
-              <a:spcBef>
-                <a:spcPts val="500"/>
-              </a:spcBef>
-              <a:defRPr sz="1600">
-                <a:solidFill>
-                  <a:srgbClr val="4B5563"/>
+              <a:spcAft>
+                <a:spcPts val="800"/>
+              </a:spcAft>
+              <a:defRPr sz="2000" b="1">
+                <a:solidFill>
+                  <a:srgbClr val="333333"/>
                 </a:solidFill>
               </a:defRPr>
             </a:pPr>
             <a:r>
-              <a:t>Invalid Python syntax</a:t>
-            </a:r>
-          </a:p>
-          <a:p>
-            <a:pPr>
-              <a:spcBef>
-                <a:spcPts val="500"/>
-              </a:spcBef>
-              <a:defRPr sz="1600">
-                <a:solidFill>
-                  <a:srgbClr val="1F2937"/>
-                </a:solidFill>
-                <a:latin typeface="Courier New"/>
-              </a:defRPr>
-            </a:pPr>
-            <a:r>
-              <a:t>print("hello" → SyntaxError (missing closing parenthesis)</a:t>
-            </a:r>
-          </a:p>
-        </p:txBody>
-      </p:sp>
-      <p:sp>
-        <p:nvSpPr>
-          <p:cNvPr id="10" name="Rectangle 9"/>
-          <p:cNvSpPr/>
-          <p:nvPr/>
-        </p:nvSpPr>
-        <p:spPr>
-          <a:xfrm>
-            <a:off x="457200" y="4297680"/>
-            <a:ext cx="73152" cy="1005840"/>
-          </a:xfrm>
-          <a:prstGeom prst="rect">
-            <a:avLst/>
-          </a:prstGeom>
-          <a:solidFill>
-            <a:srgbClr val="EF4444"/>
-          </a:solidFill>
-          <a:ln>
-            <a:noFill/>
-          </a:ln>
-        </p:spPr>
-        <p:style>
-          <a:lnRef idx="1">
-            <a:schemeClr val="accent1"/>
-          </a:lnRef>
-          <a:fillRef idx="3">
-            <a:schemeClr val="accent1"/>
-          </a:fillRef>
-          <a:effectRef idx="2">
-            <a:schemeClr val="accent1"/>
-          </a:effectRef>
-          <a:fontRef idx="minor">
-            <a:schemeClr val="lt1"/>
-          </a:fontRef>
-        </p:style>
-        <p:txBody>
-          <a:bodyPr rtlCol="0" anchor="ctr"/>
-          <a:lstStyle/>
-          <a:p>
-            <a:pPr algn="ctr"/>
-          </a:p>
-        </p:txBody>
-      </p:sp>
-      <p:sp>
-        <p:nvSpPr>
-          <p:cNvPr id="11" name="Rectangle 10"/>
-          <p:cNvSpPr/>
-          <p:nvPr/>
-        </p:nvSpPr>
-        <p:spPr>
-          <a:xfrm>
-            <a:off x="457200" y="5486400"/>
-            <a:ext cx="8229600" cy="731520"/>
-          </a:xfrm>
-          <a:prstGeom prst="rect">
-            <a:avLst/>
-          </a:prstGeom>
-          <a:solidFill>
-            <a:srgbClr val="DBEAFE"/>
-          </a:solidFill>
-          <a:ln>
-            <a:noFill/>
-          </a:ln>
-        </p:spPr>
-        <p:style>
-          <a:lnRef idx="1">
-            <a:schemeClr val="accent1"/>
-          </a:lnRef>
-          <a:fillRef idx="3">
-            <a:schemeClr val="accent1"/>
-          </a:fillRef>
-          <a:effectRef idx="2">
-            <a:schemeClr val="accent1"/>
-          </a:effectRef>
-          <a:fontRef idx="minor">
-            <a:schemeClr val="lt1"/>
-          </a:fontRef>
-        </p:style>
-        <p:txBody>
-          <a:bodyPr rtlCol="0" anchor="ctr" tIns="137160" lIns="228600"/>
-          <a:lstStyle/>
-          <a:p>
-            <a:pPr algn="ctr"/>
-            <a:r>
-              <a:rPr sz="1800" b="1">
-                <a:solidFill>
-                  <a:srgbClr val="1F2937"/>
-                </a:solidFill>
-              </a:rPr>
-              <a:t>💡 Tip: </a:t>
-            </a:r>
-            <a:r>
-              <a:rPr sz="1800">
-                <a:solidFill>
-                  <a:srgbClr val="1F2937"/>
-                </a:solidFill>
-              </a:rPr>
-              <a:t>Read error messages carefully - they tell you what went wrong!</a:t>
+              <a:t>💡 Tip:Read error messages carefully - they tell you what went wrong!</a:t>
             </a:r>
           </a:p>
         </p:txBody>
@@ -6700,14 +5412,6 @@
 <file path=ppt/slides/slide9.xml><?xml version="1.0" encoding="utf-8"?>
 <p:sld xmlns:a="http://schemas.openxmlformats.org/drawingml/2006/main" xmlns:p="http://schemas.openxmlformats.org/presentationml/2006/main" xmlns:r="http://schemas.openxmlformats.org/officeDocument/2006/relationships">
   <p:cSld>
-    <p:bg>
-      <p:bgPr>
-        <a:solidFill>
-          <a:srgbClr val="EFF6FF"/>
-        </a:solidFill>
-        <a:effectLst/>
-      </p:bgPr>
-    </p:bg>
     <p:spTree>
       <p:nvGrpSpPr>
         <p:cNvPr id="1" name=""/>
@@ -6717,92 +5421,14 @@
       <p:grpSpPr/>
       <p:sp>
         <p:nvSpPr>
-          <p:cNvPr id="2" name="TextBox 1"/>
-          <p:cNvSpPr txBox="1"/>
-          <p:nvPr/>
-        </p:nvSpPr>
-        <p:spPr>
-          <a:xfrm>
-            <a:off x="457200" y="274320"/>
-            <a:ext cx="8229600" cy="731520"/>
-          </a:xfrm>
-          <a:prstGeom prst="rect">
-            <a:avLst/>
-          </a:prstGeom>
-          <a:noFill/>
-        </p:spPr>
-        <p:txBody>
-          <a:bodyPr wrap="none">
-            <a:spAutoFit/>
-          </a:bodyPr>
-          <a:lstStyle/>
-          <a:p>
-            <a:pPr>
-              <a:defRPr sz="4400" b="1">
-                <a:solidFill>
-                  <a:srgbClr val="1F2937"/>
-                </a:solidFill>
-              </a:defRPr>
-            </a:pPr>
-            <a:r>
-              <a:t>Interactive Program Example 🎮</a:t>
-            </a:r>
-          </a:p>
-        </p:txBody>
-      </p:sp>
-      <p:sp>
-        <p:nvSpPr>
-          <p:cNvPr id="3" name="Rectangle 2"/>
+          <p:cNvPr id="2" name="Rectangle 1"/>
           <p:cNvSpPr/>
           <p:nvPr/>
         </p:nvSpPr>
         <p:spPr>
           <a:xfrm>
-            <a:off x="457200" y="914400"/>
-            <a:ext cx="1371600" cy="45720"/>
-          </a:xfrm>
-          <a:prstGeom prst="rect">
-            <a:avLst/>
-          </a:prstGeom>
-          <a:solidFill>
-            <a:srgbClr val="2563EB"/>
-          </a:solidFill>
-          <a:ln>
-            <a:noFill/>
-          </a:ln>
-        </p:spPr>
-        <p:style>
-          <a:lnRef idx="1">
-            <a:schemeClr val="accent1"/>
-          </a:lnRef>
-          <a:fillRef idx="3">
-            <a:schemeClr val="accent1"/>
-          </a:fillRef>
-          <a:effectRef idx="2">
-            <a:schemeClr val="accent1"/>
-          </a:effectRef>
-          <a:fontRef idx="minor">
-            <a:schemeClr val="lt1"/>
-          </a:fontRef>
-        </p:style>
-        <p:txBody>
-          <a:bodyPr rtlCol="0" anchor="ctr"/>
-          <a:lstStyle/>
-          <a:p>
-            <a:pPr algn="ctr"/>
-          </a:p>
-        </p:txBody>
-      </p:sp>
-      <p:sp>
-        <p:nvSpPr>
-          <p:cNvPr id="4" name="Rectangle 3"/>
-          <p:cNvSpPr/>
-          <p:nvPr/>
-        </p:nvSpPr>
-        <p:spPr>
-          <a:xfrm>
-            <a:off x="731520" y="1463040"/>
-            <a:ext cx="7680960" cy="4572000"/>
+            <a:off x="0" y="0"/>
+            <a:ext cx="12191695" cy="6858000"/>
           </a:xfrm>
           <a:prstGeom prst="rect">
             <a:avLst/>
@@ -6813,7 +5439,6 @@
           <a:ln>
             <a:noFill/>
           </a:ln>
-          <a:effectLst/>
         </p:spPr>
         <p:style>
           <a:lnRef idx="1">
@@ -6830,199 +5455,168 @@
           </a:fontRef>
         </p:style>
         <p:txBody>
-          <a:bodyPr rtlCol="0" anchor="ctr" tIns="228600" lIns="274320"/>
-          <a:lstStyle/>
-          <a:p>
-            <a:pPr algn="ctr">
-              <a:defRPr sz="2800" b="1">
-                <a:solidFill>
-                  <a:srgbClr val="2563EB"/>
+          <a:bodyPr rtlCol="0" anchor="ctr"/>
+          <a:lstStyle/>
+          <a:p>
+            <a:pPr algn="ctr"/>
+          </a:p>
+        </p:txBody>
+      </p:sp>
+      <p:sp>
+        <p:nvSpPr>
+          <p:cNvPr id="3" name="Rectangle 2"/>
+          <p:cNvSpPr/>
+          <p:nvPr/>
+        </p:nvSpPr>
+        <p:spPr>
+          <a:xfrm>
+            <a:off x="0" y="0"/>
+            <a:ext cx="12191695" cy="137160"/>
+          </a:xfrm>
+          <a:prstGeom prst="rect">
+            <a:avLst/>
+          </a:prstGeom>
+          <a:solidFill>
+            <a:srgbClr val="0066CC"/>
+          </a:solidFill>
+          <a:ln>
+            <a:noFill/>
+          </a:ln>
+        </p:spPr>
+        <p:style>
+          <a:lnRef idx="1">
+            <a:schemeClr val="accent1"/>
+          </a:lnRef>
+          <a:fillRef idx="3">
+            <a:schemeClr val="accent1"/>
+          </a:fillRef>
+          <a:effectRef idx="2">
+            <a:schemeClr val="accent1"/>
+          </a:effectRef>
+          <a:fontRef idx="minor">
+            <a:schemeClr val="lt1"/>
+          </a:fontRef>
+        </p:style>
+        <p:txBody>
+          <a:bodyPr rtlCol="0" anchor="ctr"/>
+          <a:lstStyle/>
+          <a:p>
+            <a:pPr algn="ctr"/>
+          </a:p>
+        </p:txBody>
+      </p:sp>
+      <p:sp>
+        <p:nvSpPr>
+          <p:cNvPr id="4" name="TextBox 3"/>
+          <p:cNvSpPr txBox="1"/>
+          <p:nvPr/>
+        </p:nvSpPr>
+        <p:spPr>
+          <a:xfrm>
+            <a:off x="457200" y="365760"/>
+            <a:ext cx="10972800" cy="731520"/>
+          </a:xfrm>
+          <a:prstGeom prst="rect">
+            <a:avLst/>
+          </a:prstGeom>
+          <a:noFill/>
+        </p:spPr>
+        <p:txBody>
+          <a:bodyPr wrap="none">
+            <a:spAutoFit/>
+          </a:bodyPr>
+          <a:lstStyle/>
+          <a:p>
+            <a:pPr>
+              <a:defRPr sz="4000" b="1">
+                <a:solidFill>
+                  <a:srgbClr val="003366"/>
                 </a:solidFill>
               </a:defRPr>
             </a:pPr>
             <a:r>
+              <a:t>Interactive Program Example 🎮</a:t>
+            </a:r>
+          </a:p>
+        </p:txBody>
+      </p:sp>
+      <p:sp>
+        <p:nvSpPr>
+          <p:cNvPr id="5" name="Rectangle 4"/>
+          <p:cNvSpPr/>
+          <p:nvPr/>
+        </p:nvSpPr>
+        <p:spPr>
+          <a:xfrm>
+            <a:off x="457200" y="1005840"/>
+            <a:ext cx="1828800" cy="45720"/>
+          </a:xfrm>
+          <a:prstGeom prst="rect">
+            <a:avLst/>
+          </a:prstGeom>
+          <a:solidFill>
+            <a:srgbClr val="0066CC"/>
+          </a:solidFill>
+          <a:ln>
+            <a:noFill/>
+          </a:ln>
+        </p:spPr>
+        <p:style>
+          <a:lnRef idx="1">
+            <a:schemeClr val="accent1"/>
+          </a:lnRef>
+          <a:fillRef idx="3">
+            <a:schemeClr val="accent1"/>
+          </a:fillRef>
+          <a:effectRef idx="2">
+            <a:schemeClr val="accent1"/>
+          </a:effectRef>
+          <a:fontRef idx="minor">
+            <a:schemeClr val="lt1"/>
+          </a:fontRef>
+        </p:style>
+        <p:txBody>
+          <a:bodyPr rtlCol="0" anchor="ctr"/>
+          <a:lstStyle/>
+          <a:p>
+            <a:pPr algn="ctr"/>
+          </a:p>
+        </p:txBody>
+      </p:sp>
+      <p:sp>
+        <p:nvSpPr>
+          <p:cNvPr id="6" name="TextBox 5"/>
+          <p:cNvSpPr txBox="1"/>
+          <p:nvPr/>
+        </p:nvSpPr>
+        <p:spPr>
+          <a:xfrm>
+            <a:off x="640080" y="1371600"/>
+            <a:ext cx="10789920" cy="4572000"/>
+          </a:xfrm>
+          <a:prstGeom prst="rect">
+            <a:avLst/>
+          </a:prstGeom>
+          <a:noFill/>
+        </p:spPr>
+        <p:txBody>
+          <a:bodyPr wrap="square">
+            <a:spAutoFit/>
+          </a:bodyPr>
+          <a:lstStyle/>
+          <a:p>
+            <a:pPr>
+              <a:spcAft>
+                <a:spcPts val="800"/>
+              </a:spcAft>
+              <a:defRPr sz="2000" b="1">
+                <a:solidFill>
+                  <a:srgbClr val="333333"/>
+                </a:solidFill>
+              </a:defRPr>
+            </a:pPr>
+            <a:r>
               <a:t>Personal Calculator</a:t>
-            </a:r>
-          </a:p>
-          <a:p>
-            <a:pPr>
-              <a:spcBef>
-                <a:spcPts val="1500"/>
-              </a:spcBef>
-              <a:defRPr sz="1800">
-                <a:solidFill>
-                  <a:srgbClr val="9CA3AF"/>
-                </a:solidFill>
-                <a:latin typeface="Courier New"/>
-              </a:defRPr>
-            </a:pPr>
-            <a:r>
-              <a:t># Get user information</a:t>
-            </a:r>
-          </a:p>
-          <a:p>
-            <a:pPr>
-              <a:spcBef>
-                <a:spcPts val="500"/>
-              </a:spcBef>
-              <a:defRPr sz="1800">
-                <a:solidFill>
-                  <a:srgbClr val="1F2937"/>
-                </a:solidFill>
-                <a:latin typeface="Courier New"/>
-              </a:defRPr>
-            </a:pPr>
-            <a:r>
-              <a:t>name = input("What's your name? ")</a:t>
-            </a:r>
-          </a:p>
-          <a:p>
-            <a:pPr>
-              <a:spcBef>
-                <a:spcPts val="500"/>
-              </a:spcBef>
-              <a:defRPr sz="1800">
-                <a:solidFill>
-                  <a:srgbClr val="1F2937"/>
-                </a:solidFill>
-                <a:latin typeface="Courier New"/>
-              </a:defRPr>
-            </a:pPr>
-            <a:r>
-              <a:t>age = int(input("How old are you? "))</a:t>
-            </a:r>
-          </a:p>
-          <a:p>
-            <a:pPr>
-              <a:spcBef>
-                <a:spcPts val="800"/>
-              </a:spcBef>
-            </a:pPr>
-          </a:p>
-          <a:p>
-            <a:pPr>
-              <a:spcBef>
-                <a:spcPts val="500"/>
-              </a:spcBef>
-              <a:defRPr sz="1800">
-                <a:solidFill>
-                  <a:srgbClr val="9CA3AF"/>
-                </a:solidFill>
-                <a:latin typeface="Courier New"/>
-              </a:defRPr>
-            </a:pPr>
-            <a:r>
-              <a:t># Calculate years until retirement (assume 65)</a:t>
-            </a:r>
-          </a:p>
-          <a:p>
-            <a:pPr>
-              <a:spcBef>
-                <a:spcPts val="500"/>
-              </a:spcBef>
-              <a:defRPr sz="1800">
-                <a:solidFill>
-                  <a:srgbClr val="1F2937"/>
-                </a:solidFill>
-                <a:latin typeface="Courier New"/>
-              </a:defRPr>
-            </a:pPr>
-            <a:r>
-              <a:t>years_left = 65 - age</a:t>
-            </a:r>
-          </a:p>
-          <a:p>
-            <a:pPr>
-              <a:spcBef>
-                <a:spcPts val="800"/>
-              </a:spcBef>
-            </a:pPr>
-          </a:p>
-          <a:p>
-            <a:pPr>
-              <a:spcBef>
-                <a:spcPts val="500"/>
-              </a:spcBef>
-              <a:defRPr sz="1800">
-                <a:solidFill>
-                  <a:srgbClr val="9CA3AF"/>
-                </a:solidFill>
-                <a:latin typeface="Courier New"/>
-              </a:defRPr>
-            </a:pPr>
-            <a:r>
-              <a:t># Format name nicely</a:t>
-            </a:r>
-          </a:p>
-          <a:p>
-            <a:pPr>
-              <a:spcBef>
-                <a:spcPts val="500"/>
-              </a:spcBef>
-              <a:defRPr sz="1800">
-                <a:solidFill>
-                  <a:srgbClr val="1F2937"/>
-                </a:solidFill>
-                <a:latin typeface="Courier New"/>
-              </a:defRPr>
-            </a:pPr>
-            <a:r>
-              <a:t>formatted_name = name.upper()</a:t>
-            </a:r>
-          </a:p>
-          <a:p>
-            <a:pPr>
-              <a:spcBef>
-                <a:spcPts val="800"/>
-              </a:spcBef>
-            </a:pPr>
-          </a:p>
-          <a:p>
-            <a:pPr>
-              <a:spcBef>
-                <a:spcPts val="500"/>
-              </a:spcBef>
-              <a:defRPr sz="1800">
-                <a:solidFill>
-                  <a:srgbClr val="9CA3AF"/>
-                </a:solidFill>
-                <a:latin typeface="Courier New"/>
-              </a:defRPr>
-            </a:pPr>
-            <a:r>
-              <a:t># Display personalized message</a:t>
-            </a:r>
-          </a:p>
-          <a:p>
-            <a:pPr>
-              <a:spcBef>
-                <a:spcPts val="500"/>
-              </a:spcBef>
-              <a:defRPr sz="1600">
-                <a:solidFill>
-                  <a:srgbClr val="1F2937"/>
-                </a:solidFill>
-                <a:latin typeface="Courier New"/>
-              </a:defRPr>
-            </a:pPr>
-            <a:r>
-              <a:t>message = f"Hello {formatted_name}! You have {years_left} years until retirement."</a:t>
-            </a:r>
-          </a:p>
-          <a:p>
-            <a:pPr>
-              <a:spcBef>
-                <a:spcPts val="500"/>
-              </a:spcBef>
-              <a:defRPr sz="1800">
-                <a:solidFill>
-                  <a:srgbClr val="1F2937"/>
-                </a:solidFill>
-                <a:latin typeface="Courier New"/>
-              </a:defRPr>
-            </a:pPr>
-            <a:r>
-              <a:t>print(message)</a:t>
             </a:r>
           </a:p>
         </p:txBody>
